--- a/public/lessons/year-6-maths/summer/week-24/solve-compound-area-problems/teaching-powerpoint-v1.pptx
+++ b/public/lessons/year-6-maths/summer/week-24/solve-compound-area-problems/teaching-powerpoint-v1.pptx
@@ -2,24 +2,24 @@
 <file path=ppt/presentation.xml><?xml version="1.0" encoding="utf-8"?>
 <p:presentation xmlns:p="http://schemas.openxmlformats.org/presentationml/2006/main">
   <p:sldMasterIdLst>
-    <p:sldMasterId xmlns:r="http://schemas.openxmlformats.org/officeDocument/2006/relationships" id="2147483648" r:id="R3a3e2b676e4f450b"/>
+    <p:sldMasterId xmlns:r="http://schemas.openxmlformats.org/officeDocument/2006/relationships" id="2147483648" r:id="Rae37d4b6334043c3"/>
   </p:sldMasterIdLst>
   <p:notesMasterIdLst>
-    <p:notesMasterId xmlns:r="http://schemas.openxmlformats.org/officeDocument/2006/relationships" r:id="R680bb9de26e041da"/>
+    <p:notesMasterId xmlns:r="http://schemas.openxmlformats.org/officeDocument/2006/relationships" r:id="R62fa20cbab664812"/>
   </p:notesMasterIdLst>
   <p:sldIdLst>
-    <p:sldId xmlns:r="http://schemas.openxmlformats.org/officeDocument/2006/relationships" id="256" r:id="R0dffb2cfe38f44e4"/>
-    <p:sldId xmlns:r="http://schemas.openxmlformats.org/officeDocument/2006/relationships" id="257" r:id="Re18c9454406a4b2d"/>
-    <p:sldId xmlns:r="http://schemas.openxmlformats.org/officeDocument/2006/relationships" id="258" r:id="Ra2d98dc4d4214cd0"/>
-    <p:sldId xmlns:r="http://schemas.openxmlformats.org/officeDocument/2006/relationships" id="259" r:id="R5420083ce3494258"/>
-    <p:sldId xmlns:r="http://schemas.openxmlformats.org/officeDocument/2006/relationships" id="260" r:id="Rcb3e8d1730fa410d"/>
-    <p:sldId xmlns:r="http://schemas.openxmlformats.org/officeDocument/2006/relationships" id="261" r:id="Rc9b1eaeea3c540de"/>
-    <p:sldId xmlns:r="http://schemas.openxmlformats.org/officeDocument/2006/relationships" id="262" r:id="Rca750eb2ec4c49dd"/>
-    <p:sldId xmlns:r="http://schemas.openxmlformats.org/officeDocument/2006/relationships" id="263" r:id="R84950f23f0d44507"/>
-    <p:sldId xmlns:r="http://schemas.openxmlformats.org/officeDocument/2006/relationships" id="264" r:id="R134d84a87f7e40d0"/>
-    <p:sldId xmlns:r="http://schemas.openxmlformats.org/officeDocument/2006/relationships" id="265" r:id="Rddff43c96cee4010"/>
-    <p:sldId xmlns:r="http://schemas.openxmlformats.org/officeDocument/2006/relationships" id="266" r:id="Rb7d66f90b9d04488"/>
-    <p:sldId xmlns:r="http://schemas.openxmlformats.org/officeDocument/2006/relationships" id="267" r:id="R2c305156aa72489b"/>
+    <p:sldId xmlns:r="http://schemas.openxmlformats.org/officeDocument/2006/relationships" id="256" r:id="R544242f9fa474ffc"/>
+    <p:sldId xmlns:r="http://schemas.openxmlformats.org/officeDocument/2006/relationships" id="257" r:id="R9a0e86fa54374299"/>
+    <p:sldId xmlns:r="http://schemas.openxmlformats.org/officeDocument/2006/relationships" id="258" r:id="Rc9285a6dfe6c47d6"/>
+    <p:sldId xmlns:r="http://schemas.openxmlformats.org/officeDocument/2006/relationships" id="259" r:id="R8ef4de9efd3b4657"/>
+    <p:sldId xmlns:r="http://schemas.openxmlformats.org/officeDocument/2006/relationships" id="260" r:id="R3dafeda2077b4fca"/>
+    <p:sldId xmlns:r="http://schemas.openxmlformats.org/officeDocument/2006/relationships" id="261" r:id="Rb4b7e1e3f3f3444a"/>
+    <p:sldId xmlns:r="http://schemas.openxmlformats.org/officeDocument/2006/relationships" id="262" r:id="R79d7202f47f349e5"/>
+    <p:sldId xmlns:r="http://schemas.openxmlformats.org/officeDocument/2006/relationships" id="263" r:id="Rc4f9699abdb34b2d"/>
+    <p:sldId xmlns:r="http://schemas.openxmlformats.org/officeDocument/2006/relationships" id="264" r:id="Raf5a703b9cc24ae0"/>
+    <p:sldId xmlns:r="http://schemas.openxmlformats.org/officeDocument/2006/relationships" id="265" r:id="R5cf30457019b4baf"/>
+    <p:sldId xmlns:r="http://schemas.openxmlformats.org/officeDocument/2006/relationships" id="266" r:id="Red8f1bbb00924816"/>
+    <p:sldId xmlns:r="http://schemas.openxmlformats.org/officeDocument/2006/relationships" id="267" r:id="R5c3630fb010e41d8"/>
   </p:sldIdLst>
   <p:sldSz cx="12192000" cy="6858000"/>
   <p:notesSz cx="6858000" cy="9144000"/>
@@ -873,7 +873,7 @@
           <a:lstStyle xmlns:a="http://schemas.openxmlformats.org/drawingml/2006/main"/>
           <a:p xmlns:a="http://schemas.openxmlformats.org/drawingml/2006/main">
             <a:r>
-              <a:t>I do. Reveal the question, setup and each calculation stage one click at a time. Pupils watch before copying. Model answer: 80 cm2.</a:t>
+              <a:t>I do. Reveal the question, then reveal each mathematical change one click at a time. Point to the numbers and operation that changed before moving to the next line. Final answer: 80 cm2.</a:t>
             </a:r>
           </a:p>
         </p:txBody>
@@ -1291,7 +1291,7 @@
   </p:cSld>
   <p:clrMap bg1="lt1" tx1="dk1" bg2="lt2" tx2="dk2" accent1="accent1" accent2="accent2" accent3="accent3" accent4="accent4" accent5="accent5" accent6="accent6" hlink="hlink" folHlink="folHlink"/>
   <p:sldLayoutIdLst>
-    <p:sldLayoutId xmlns:r="http://schemas.openxmlformats.org/officeDocument/2006/relationships" id="2147483649" r:id="R10bd9823719f4721"/>
+    <p:sldLayoutId xmlns:r="http://schemas.openxmlformats.org/officeDocument/2006/relationships" id="2147483649" r:id="Rf512a22927134b10"/>
   </p:sldLayoutIdLst>
   <p:txStyles>
     <p:titleStyle>
@@ -1842,7 +1842,7 @@
           <p:cNvPr id="12" name="">
             <a:extLst xmlns:a="http://schemas.openxmlformats.org/drawingml/2006/main">
               <a:ext uri="{FF2B5EF4-FFF2-40B4-BE49-F238E27FC236}">
-                <a16:creationId xmlns:a16="http://schemas.microsoft.com/office/drawing/2014/main" id="{84C2A9CA-459D-4C26-84CE-07272A8C6834}"/>
+                <a16:creationId xmlns:a16="http://schemas.microsoft.com/office/drawing/2014/main" id="{ADBE6759-95D9-4E81-9E7C-B1668536FC12}"/>
               </a:ext>
             </a:extLst>
           </p:cNvPr>
@@ -1874,7 +1874,7 @@
           <p:cNvPr id="2" name="">
             <a:extLst xmlns:a="http://schemas.openxmlformats.org/drawingml/2006/main">
               <a:ext uri="{FF2B5EF4-FFF2-40B4-BE49-F238E27FC236}">
-                <a16:creationId xmlns:a16="http://schemas.microsoft.com/office/drawing/2014/main" id="{EB773588-9B55-4B6C-8F7F-315392A2AD89}"/>
+                <a16:creationId xmlns:a16="http://schemas.microsoft.com/office/drawing/2014/main" id="{C2DBAA33-1CFB-41EC-91DB-B7ED16397859}"/>
               </a:ext>
             </a:extLst>
           </p:cNvPr>
@@ -1931,7 +1931,7 @@
           <p:cNvPr id="3" name="">
             <a:extLst xmlns:a="http://schemas.openxmlformats.org/drawingml/2006/main">
               <a:ext uri="{FF2B5EF4-FFF2-40B4-BE49-F238E27FC236}">
-                <a16:creationId xmlns:a16="http://schemas.microsoft.com/office/drawing/2014/main" id="{BE6DAF18-7A1F-4FAB-9EAD-0990B3B57D61}"/>
+                <a16:creationId xmlns:a16="http://schemas.microsoft.com/office/drawing/2014/main" id="{11B3A9E3-CC0D-4656-88A8-5D1D15C9433F}"/>
               </a:ext>
             </a:extLst>
           </p:cNvPr>
@@ -1965,7 +1965,7 @@
           <p:cNvPr id="4" name="">
             <a:extLst xmlns:a="http://schemas.openxmlformats.org/drawingml/2006/main">
               <a:ext uri="{FF2B5EF4-FFF2-40B4-BE49-F238E27FC236}">
-                <a16:creationId xmlns:a16="http://schemas.microsoft.com/office/drawing/2014/main" id="{BC11434C-9FAA-4DBF-B05E-A85F5CC3E801}"/>
+                <a16:creationId xmlns:a16="http://schemas.microsoft.com/office/drawing/2014/main" id="{DD7B3052-5C2A-4064-A309-AFFD9FF548A7}"/>
               </a:ext>
             </a:extLst>
           </p:cNvPr>
@@ -2022,7 +2022,7 @@
           <p:cNvPr id="5" name="">
             <a:extLst xmlns:a="http://schemas.openxmlformats.org/drawingml/2006/main">
               <a:ext uri="{FF2B5EF4-FFF2-40B4-BE49-F238E27FC236}">
-                <a16:creationId xmlns:a16="http://schemas.microsoft.com/office/drawing/2014/main" id="{6784256E-CA8F-49BF-8DBD-009901D54C41}"/>
+                <a16:creationId xmlns:a16="http://schemas.microsoft.com/office/drawing/2014/main" id="{33BBF797-7D85-4A0A-AD44-CED58CC2944B}"/>
               </a:ext>
             </a:extLst>
           </p:cNvPr>
@@ -2079,7 +2079,7 @@
           <p:cNvPr id="6" name="">
             <a:extLst xmlns:a="http://schemas.openxmlformats.org/drawingml/2006/main">
               <a:ext uri="{FF2B5EF4-FFF2-40B4-BE49-F238E27FC236}">
-                <a16:creationId xmlns:a16="http://schemas.microsoft.com/office/drawing/2014/main" id="{F2FD6B37-B40A-4860-B998-3F3ED9925DEF}"/>
+                <a16:creationId xmlns:a16="http://schemas.microsoft.com/office/drawing/2014/main" id="{976F6AB6-4E74-4C53-A6ED-FB460C8AFC87}"/>
               </a:ext>
             </a:extLst>
           </p:cNvPr>
@@ -2113,7 +2113,7 @@
           <p:cNvPr id="7" name="">
             <a:extLst xmlns:a="http://schemas.openxmlformats.org/drawingml/2006/main">
               <a:ext uri="{FF2B5EF4-FFF2-40B4-BE49-F238E27FC236}">
-                <a16:creationId xmlns:a16="http://schemas.microsoft.com/office/drawing/2014/main" id="{DFB9C789-16AF-48A3-A29D-89EF5B772FF8}"/>
+                <a16:creationId xmlns:a16="http://schemas.microsoft.com/office/drawing/2014/main" id="{7161EC76-0369-43C1-876E-178B17827DD8}"/>
               </a:ext>
             </a:extLst>
           </p:cNvPr>
@@ -2170,7 +2170,7 @@
           <p:cNvPr id="8" name="">
             <a:extLst xmlns:a="http://schemas.openxmlformats.org/drawingml/2006/main">
               <a:ext uri="{FF2B5EF4-FFF2-40B4-BE49-F238E27FC236}">
-                <a16:creationId xmlns:a16="http://schemas.microsoft.com/office/drawing/2014/main" id="{7EE3535F-8DDB-4BD9-9036-5CDA417F3C53}"/>
+                <a16:creationId xmlns:a16="http://schemas.microsoft.com/office/drawing/2014/main" id="{E1A7D368-AD6D-42E3-AEE0-6E34C0C0FF1C}"/>
               </a:ext>
             </a:extLst>
           </p:cNvPr>
@@ -2227,7 +2227,7 @@
           <p:cNvPr id="9" name="">
             <a:extLst xmlns:a="http://schemas.openxmlformats.org/drawingml/2006/main">
               <a:ext uri="{FF2B5EF4-FFF2-40B4-BE49-F238E27FC236}">
-                <a16:creationId xmlns:a16="http://schemas.microsoft.com/office/drawing/2014/main" id="{12E1444C-8B54-448D-8DE1-283D0909FA86}"/>
+                <a16:creationId xmlns:a16="http://schemas.microsoft.com/office/drawing/2014/main" id="{0F6FF1C3-BECE-4923-96DF-4E43177C8A4F}"/>
               </a:ext>
             </a:extLst>
           </p:cNvPr>
@@ -2284,7 +2284,7 @@
           <p:cNvPr id="10" name="">
             <a:extLst xmlns:a="http://schemas.openxmlformats.org/drawingml/2006/main">
               <a:ext uri="{FF2B5EF4-FFF2-40B4-BE49-F238E27FC236}">
-                <a16:creationId xmlns:a16="http://schemas.microsoft.com/office/drawing/2014/main" id="{BA6FCC0E-5B8B-4160-AEEE-4DD362BB3FA7}"/>
+                <a16:creationId xmlns:a16="http://schemas.microsoft.com/office/drawing/2014/main" id="{4556EC8E-001A-496D-9060-608D50338ED1}"/>
               </a:ext>
             </a:extLst>
           </p:cNvPr>
@@ -2341,7 +2341,7 @@
           <p:cNvPr id="11" name="">
             <a:extLst xmlns:a="http://schemas.openxmlformats.org/drawingml/2006/main">
               <a:ext uri="{FF2B5EF4-FFF2-40B4-BE49-F238E27FC236}">
-                <a16:creationId xmlns:a16="http://schemas.microsoft.com/office/drawing/2014/main" id="{79744198-ADAD-475C-A342-86549BDEC84C}"/>
+                <a16:creationId xmlns:a16="http://schemas.microsoft.com/office/drawing/2014/main" id="{477C497F-11D3-4FF9-877D-EBC690175927}"/>
               </a:ext>
             </a:extLst>
           </p:cNvPr>
@@ -2396,7 +2396,7 @@
     </p:spTree>
     <p:extLst>
       <p:ext uri="{BB962C8B-B14F-4D97-AF65-F5344CB8AC3E}">
-        <p14:creationId xmlns:p14="http://schemas.microsoft.com/office/powerpoint/2010/main" val="1226408567"/>
+        <p14:creationId xmlns:p14="http://schemas.microsoft.com/office/powerpoint/2010/main" val="1290820221"/>
       </p:ext>
     </p:extLst>
   </p:cSld>
@@ -2427,7 +2427,7 @@
           <p:cNvPr id="14" name="">
             <a:extLst xmlns:a="http://schemas.openxmlformats.org/drawingml/2006/main">
               <a:ext uri="{FF2B5EF4-FFF2-40B4-BE49-F238E27FC236}">
-                <a16:creationId xmlns:a16="http://schemas.microsoft.com/office/drawing/2014/main" id="{83A33DB2-627C-4545-A157-4CD3B558A917}"/>
+                <a16:creationId xmlns:a16="http://schemas.microsoft.com/office/drawing/2014/main" id="{4138A92E-2FA2-40C2-8DF5-C0C936E57EC2}"/>
               </a:ext>
             </a:extLst>
           </p:cNvPr>
@@ -2459,7 +2459,7 @@
           <p:cNvPr id="2" name="">
             <a:extLst xmlns:a="http://schemas.openxmlformats.org/drawingml/2006/main">
               <a:ext uri="{FF2B5EF4-FFF2-40B4-BE49-F238E27FC236}">
-                <a16:creationId xmlns:a16="http://schemas.microsoft.com/office/drawing/2014/main" id="{C00E4A53-2CAA-4AC6-A34A-84A924E73460}"/>
+                <a16:creationId xmlns:a16="http://schemas.microsoft.com/office/drawing/2014/main" id="{D430AB00-5A12-4120-B227-5141A94A9D81}"/>
               </a:ext>
             </a:extLst>
           </p:cNvPr>
@@ -2516,7 +2516,7 @@
           <p:cNvPr id="3" name="">
             <a:extLst xmlns:a="http://schemas.openxmlformats.org/drawingml/2006/main">
               <a:ext uri="{FF2B5EF4-FFF2-40B4-BE49-F238E27FC236}">
-                <a16:creationId xmlns:a16="http://schemas.microsoft.com/office/drawing/2014/main" id="{AF2A85E7-3F97-4364-9021-280675AA28D1}"/>
+                <a16:creationId xmlns:a16="http://schemas.microsoft.com/office/drawing/2014/main" id="{8D519F73-99EB-408B-9F98-6CD724DAE02C}"/>
               </a:ext>
             </a:extLst>
           </p:cNvPr>
@@ -2548,7 +2548,7 @@
           <p:cNvPr id="4" name="">
             <a:extLst xmlns:a="http://schemas.openxmlformats.org/drawingml/2006/main">
               <a:ext uri="{FF2B5EF4-FFF2-40B4-BE49-F238E27FC236}">
-                <a16:creationId xmlns:a16="http://schemas.microsoft.com/office/drawing/2014/main" id="{77C3EA7C-DBB5-457A-99F7-6F94A7FA159B}"/>
+                <a16:creationId xmlns:a16="http://schemas.microsoft.com/office/drawing/2014/main" id="{18B05588-98B2-4E08-B89E-32B7A470CFDD}"/>
               </a:ext>
             </a:extLst>
           </p:cNvPr>
@@ -2605,7 +2605,7 @@
           <p:cNvPr id="5" name="">
             <a:extLst xmlns:a="http://schemas.openxmlformats.org/drawingml/2006/main">
               <a:ext uri="{FF2B5EF4-FFF2-40B4-BE49-F238E27FC236}">
-                <a16:creationId xmlns:a16="http://schemas.microsoft.com/office/drawing/2014/main" id="{5A9F75E1-3767-405E-934D-B69E451CCBB7}"/>
+                <a16:creationId xmlns:a16="http://schemas.microsoft.com/office/drawing/2014/main" id="{40831604-6636-4C43-9513-F20E9BE3BB2A}"/>
               </a:ext>
             </a:extLst>
           </p:cNvPr>
@@ -2662,7 +2662,7 @@
           <p:cNvPr id="6" name="">
             <a:extLst xmlns:a="http://schemas.openxmlformats.org/drawingml/2006/main">
               <a:ext uri="{FF2B5EF4-FFF2-40B4-BE49-F238E27FC236}">
-                <a16:creationId xmlns:a16="http://schemas.microsoft.com/office/drawing/2014/main" id="{F6DC512C-7868-4F13-A9D1-F05600F99568}"/>
+                <a16:creationId xmlns:a16="http://schemas.microsoft.com/office/drawing/2014/main" id="{40C1B18E-E4AF-4BA8-815D-28B830317C07}"/>
               </a:ext>
             </a:extLst>
           </p:cNvPr>
@@ -2719,7 +2719,7 @@
           <p:cNvPr id="7" name="">
             <a:extLst xmlns:a="http://schemas.openxmlformats.org/drawingml/2006/main">
               <a:ext uri="{FF2B5EF4-FFF2-40B4-BE49-F238E27FC236}">
-                <a16:creationId xmlns:a16="http://schemas.microsoft.com/office/drawing/2014/main" id="{93950543-C4AA-42C1-A4ED-7808DC4EC474}"/>
+                <a16:creationId xmlns:a16="http://schemas.microsoft.com/office/drawing/2014/main" id="{AB8AB97A-3D83-4DA9-B783-5702CFF6C16D}"/>
               </a:ext>
             </a:extLst>
           </p:cNvPr>
@@ -2751,7 +2751,7 @@
           <p:cNvPr id="8" name="">
             <a:extLst xmlns:a="http://schemas.openxmlformats.org/drawingml/2006/main">
               <a:ext uri="{FF2B5EF4-FFF2-40B4-BE49-F238E27FC236}">
-                <a16:creationId xmlns:a16="http://schemas.microsoft.com/office/drawing/2014/main" id="{04890C5A-76D8-4829-9A44-BAAF236154D0}"/>
+                <a16:creationId xmlns:a16="http://schemas.microsoft.com/office/drawing/2014/main" id="{A8D7D647-B1D5-4FD7-8ECF-96D73BC17DFA}"/>
               </a:ext>
             </a:extLst>
           </p:cNvPr>
@@ -2808,7 +2808,7 @@
           <p:cNvPr id="9" name="">
             <a:extLst xmlns:a="http://schemas.openxmlformats.org/drawingml/2006/main">
               <a:ext uri="{FF2B5EF4-FFF2-40B4-BE49-F238E27FC236}">
-                <a16:creationId xmlns:a16="http://schemas.microsoft.com/office/drawing/2014/main" id="{8EE978D7-0132-42CC-BBF8-C78D384B6E19}"/>
+                <a16:creationId xmlns:a16="http://schemas.microsoft.com/office/drawing/2014/main" id="{DAAE21A0-C183-46BE-8ABC-65C2BD62FB83}"/>
               </a:ext>
             </a:extLst>
           </p:cNvPr>
@@ -2865,7 +2865,7 @@
           <p:cNvPr id="10" name="">
             <a:extLst xmlns:a="http://schemas.openxmlformats.org/drawingml/2006/main">
               <a:ext uri="{FF2B5EF4-FFF2-40B4-BE49-F238E27FC236}">
-                <a16:creationId xmlns:a16="http://schemas.microsoft.com/office/drawing/2014/main" id="{C419F26F-8652-4E7A-9DA1-50A2E5E850A7}"/>
+                <a16:creationId xmlns:a16="http://schemas.microsoft.com/office/drawing/2014/main" id="{6869FD10-3AB9-4F7B-900F-B74202BF8812}"/>
               </a:ext>
             </a:extLst>
           </p:cNvPr>
@@ -2922,7 +2922,7 @@
           <p:cNvPr id="11" name="">
             <a:extLst xmlns:a="http://schemas.openxmlformats.org/drawingml/2006/main">
               <a:ext uri="{FF2B5EF4-FFF2-40B4-BE49-F238E27FC236}">
-                <a16:creationId xmlns:a16="http://schemas.microsoft.com/office/drawing/2014/main" id="{160F88F2-2804-44E7-AB5C-B0BEFFB8CADD}"/>
+                <a16:creationId xmlns:a16="http://schemas.microsoft.com/office/drawing/2014/main" id="{9CB85440-F951-4B5D-81D1-029C10605F02}"/>
               </a:ext>
             </a:extLst>
           </p:cNvPr>
@@ -2979,7 +2979,7 @@
           <p:cNvPr id="12" name="">
             <a:extLst xmlns:a="http://schemas.openxmlformats.org/drawingml/2006/main">
               <a:ext uri="{FF2B5EF4-FFF2-40B4-BE49-F238E27FC236}">
-                <a16:creationId xmlns:a16="http://schemas.microsoft.com/office/drawing/2014/main" id="{A46C3822-6F37-4CCB-A32C-679002AB9F84}"/>
+                <a16:creationId xmlns:a16="http://schemas.microsoft.com/office/drawing/2014/main" id="{054132D2-9265-491D-9649-05C7953FA682}"/>
               </a:ext>
             </a:extLst>
           </p:cNvPr>
@@ -3036,7 +3036,7 @@
           <p:cNvPr id="13" name="">
             <a:extLst xmlns:a="http://schemas.openxmlformats.org/drawingml/2006/main">
               <a:ext uri="{FF2B5EF4-FFF2-40B4-BE49-F238E27FC236}">
-                <a16:creationId xmlns:a16="http://schemas.microsoft.com/office/drawing/2014/main" id="{0AE48F9B-A2F1-4EB9-BEE9-C2D72689F6E8}"/>
+                <a16:creationId xmlns:a16="http://schemas.microsoft.com/office/drawing/2014/main" id="{219330E9-7CB0-4E5A-8536-25C65A7A5F60}"/>
               </a:ext>
             </a:extLst>
           </p:cNvPr>
@@ -3091,7 +3091,7 @@
     </p:spTree>
     <p:extLst>
       <p:ext uri="{BB962C8B-B14F-4D97-AF65-F5344CB8AC3E}">
-        <p14:creationId xmlns:p14="http://schemas.microsoft.com/office/powerpoint/2010/main" val="611594145"/>
+        <p14:creationId xmlns:p14="http://schemas.microsoft.com/office/powerpoint/2010/main" val="187701808"/>
       </p:ext>
     </p:extLst>
   </p:cSld>
@@ -3292,7 +3292,7 @@
           <p:cNvPr id="19" name="">
             <a:extLst xmlns:a="http://schemas.openxmlformats.org/drawingml/2006/main">
               <a:ext uri="{FF2B5EF4-FFF2-40B4-BE49-F238E27FC236}">
-                <a16:creationId xmlns:a16="http://schemas.microsoft.com/office/drawing/2014/main" id="{9C08CA47-F571-4BA1-938B-A6C5103257B9}"/>
+                <a16:creationId xmlns:a16="http://schemas.microsoft.com/office/drawing/2014/main" id="{DC0C5D98-E602-4BDF-B82F-EC5D5ED3E64D}"/>
               </a:ext>
             </a:extLst>
           </p:cNvPr>
@@ -3324,7 +3324,7 @@
           <p:cNvPr id="2" name="">
             <a:extLst xmlns:a="http://schemas.openxmlformats.org/drawingml/2006/main">
               <a:ext uri="{FF2B5EF4-FFF2-40B4-BE49-F238E27FC236}">
-                <a16:creationId xmlns:a16="http://schemas.microsoft.com/office/drawing/2014/main" id="{BDB89E71-6DAC-4DB2-8319-40943086B967}"/>
+                <a16:creationId xmlns:a16="http://schemas.microsoft.com/office/drawing/2014/main" id="{B1DF4581-9BCD-45A2-9298-8F6C61AD23DA}"/>
               </a:ext>
             </a:extLst>
           </p:cNvPr>
@@ -3381,7 +3381,7 @@
           <p:cNvPr id="3" name="">
             <a:extLst xmlns:a="http://schemas.openxmlformats.org/drawingml/2006/main">
               <a:ext uri="{FF2B5EF4-FFF2-40B4-BE49-F238E27FC236}">
-                <a16:creationId xmlns:a16="http://schemas.microsoft.com/office/drawing/2014/main" id="{854D3715-4A76-41F2-BD45-B8C9B3353053}"/>
+                <a16:creationId xmlns:a16="http://schemas.microsoft.com/office/drawing/2014/main" id="{A7DFD318-EE68-4C50-8F54-83B72BECFF25}"/>
               </a:ext>
             </a:extLst>
           </p:cNvPr>
@@ -3413,7 +3413,7 @@
           <p:cNvPr id="4" name="">
             <a:extLst xmlns:a="http://schemas.openxmlformats.org/drawingml/2006/main">
               <a:ext uri="{FF2B5EF4-FFF2-40B4-BE49-F238E27FC236}">
-                <a16:creationId xmlns:a16="http://schemas.microsoft.com/office/drawing/2014/main" id="{055F76BE-4C1E-4516-B088-96F5ED3DBD8A}"/>
+                <a16:creationId xmlns:a16="http://schemas.microsoft.com/office/drawing/2014/main" id="{4AFE6919-CFC6-4A23-ADBF-1924CF8803A5}"/>
               </a:ext>
             </a:extLst>
           </p:cNvPr>
@@ -3470,7 +3470,7 @@
           <p:cNvPr id="5" name="">
             <a:extLst xmlns:a="http://schemas.openxmlformats.org/drawingml/2006/main">
               <a:ext uri="{FF2B5EF4-FFF2-40B4-BE49-F238E27FC236}">
-                <a16:creationId xmlns:a16="http://schemas.microsoft.com/office/drawing/2014/main" id="{D0B806E2-BF11-4B1F-993B-56C407B247CF}"/>
+                <a16:creationId xmlns:a16="http://schemas.microsoft.com/office/drawing/2014/main" id="{73B43D36-4633-47B3-A7B5-F1978F66D703}"/>
               </a:ext>
             </a:extLst>
           </p:cNvPr>
@@ -3527,7 +3527,7 @@
           <p:cNvPr id="6" name="">
             <a:extLst xmlns:a="http://schemas.openxmlformats.org/drawingml/2006/main">
               <a:ext uri="{FF2B5EF4-FFF2-40B4-BE49-F238E27FC236}">
-                <a16:creationId xmlns:a16="http://schemas.microsoft.com/office/drawing/2014/main" id="{9C0A00B1-FC0D-470A-A48A-5624FC9F761F}"/>
+                <a16:creationId xmlns:a16="http://schemas.microsoft.com/office/drawing/2014/main" id="{F0884B8C-A900-4924-B698-4FFC6F36078B}"/>
               </a:ext>
             </a:extLst>
           </p:cNvPr>
@@ -3584,7 +3584,7 @@
           <p:cNvPr id="7" name="">
             <a:extLst xmlns:a="http://schemas.openxmlformats.org/drawingml/2006/main">
               <a:ext uri="{FF2B5EF4-FFF2-40B4-BE49-F238E27FC236}">
-                <a16:creationId xmlns:a16="http://schemas.microsoft.com/office/drawing/2014/main" id="{8DFBAF5B-C205-4200-972C-11C02674A4DC}"/>
+                <a16:creationId xmlns:a16="http://schemas.microsoft.com/office/drawing/2014/main" id="{2452F468-DC45-48E0-BE2D-FC8ECCFC0DB8}"/>
               </a:ext>
             </a:extLst>
           </p:cNvPr>
@@ -3616,7 +3616,7 @@
           <p:cNvPr id="8" name="">
             <a:extLst xmlns:a="http://schemas.openxmlformats.org/drawingml/2006/main">
               <a:ext uri="{FF2B5EF4-FFF2-40B4-BE49-F238E27FC236}">
-                <a16:creationId xmlns:a16="http://schemas.microsoft.com/office/drawing/2014/main" id="{A61648A0-F4D3-4FFD-BEF3-1095325EBB2C}"/>
+                <a16:creationId xmlns:a16="http://schemas.microsoft.com/office/drawing/2014/main" id="{014734B2-70A3-45B8-A1E7-594985664DCB}"/>
               </a:ext>
             </a:extLst>
           </p:cNvPr>
@@ -3673,7 +3673,7 @@
           <p:cNvPr id="9" name="">
             <a:extLst xmlns:a="http://schemas.openxmlformats.org/drawingml/2006/main">
               <a:ext uri="{FF2B5EF4-FFF2-40B4-BE49-F238E27FC236}">
-                <a16:creationId xmlns:a16="http://schemas.microsoft.com/office/drawing/2014/main" id="{FB0A682D-4298-4C73-A1B8-F04A116583E6}"/>
+                <a16:creationId xmlns:a16="http://schemas.microsoft.com/office/drawing/2014/main" id="{CDEA7587-7B7D-44C3-8352-89FA5E3AC8DF}"/>
               </a:ext>
             </a:extLst>
           </p:cNvPr>
@@ -3730,7 +3730,7 @@
           <p:cNvPr id="10" name="">
             <a:extLst xmlns:a="http://schemas.openxmlformats.org/drawingml/2006/main">
               <a:ext uri="{FF2B5EF4-FFF2-40B4-BE49-F238E27FC236}">
-                <a16:creationId xmlns:a16="http://schemas.microsoft.com/office/drawing/2014/main" id="{CF263A53-38FF-4662-9338-47B98E443F2B}"/>
+                <a16:creationId xmlns:a16="http://schemas.microsoft.com/office/drawing/2014/main" id="{3EA8A146-B99B-4B7B-A3A2-A5010C20F435}"/>
               </a:ext>
             </a:extLst>
           </p:cNvPr>
@@ -3787,7 +3787,7 @@
           <p:cNvPr id="11" name="">
             <a:extLst xmlns:a="http://schemas.openxmlformats.org/drawingml/2006/main">
               <a:ext uri="{FF2B5EF4-FFF2-40B4-BE49-F238E27FC236}">
-                <a16:creationId xmlns:a16="http://schemas.microsoft.com/office/drawing/2014/main" id="{2653AF23-FB30-432E-A197-B6B760820D7B}"/>
+                <a16:creationId xmlns:a16="http://schemas.microsoft.com/office/drawing/2014/main" id="{71F6A45C-6B33-4EC3-B274-5591B8181C49}"/>
               </a:ext>
             </a:extLst>
           </p:cNvPr>
@@ -3821,7 +3821,7 @@
           <p:cNvPr id="12" name="">
             <a:extLst xmlns:a="http://schemas.openxmlformats.org/drawingml/2006/main">
               <a:ext uri="{FF2B5EF4-FFF2-40B4-BE49-F238E27FC236}">
-                <a16:creationId xmlns:a16="http://schemas.microsoft.com/office/drawing/2014/main" id="{DC4E04CF-9E15-417F-9632-9711E9F8A221}"/>
+                <a16:creationId xmlns:a16="http://schemas.microsoft.com/office/drawing/2014/main" id="{89854D82-AD12-49D7-89F7-DAF53519B475}"/>
               </a:ext>
             </a:extLst>
           </p:cNvPr>
@@ -3878,7 +3878,7 @@
           <p:cNvPr id="13" name="">
             <a:extLst xmlns:a="http://schemas.openxmlformats.org/drawingml/2006/main">
               <a:ext uri="{FF2B5EF4-FFF2-40B4-BE49-F238E27FC236}">
-                <a16:creationId xmlns:a16="http://schemas.microsoft.com/office/drawing/2014/main" id="{7A3AE234-2C34-445D-859E-8183D3E93E73}"/>
+                <a16:creationId xmlns:a16="http://schemas.microsoft.com/office/drawing/2014/main" id="{0171DB10-0292-41FE-9616-7B7B2A2494E6}"/>
               </a:ext>
             </a:extLst>
           </p:cNvPr>
@@ -3935,7 +3935,7 @@
           <p:cNvPr id="14" name="">
             <a:extLst xmlns:a="http://schemas.openxmlformats.org/drawingml/2006/main">
               <a:ext uri="{FF2B5EF4-FFF2-40B4-BE49-F238E27FC236}">
-                <a16:creationId xmlns:a16="http://schemas.microsoft.com/office/drawing/2014/main" id="{640F6B9C-FC4E-44ED-90EC-28BB8BD0E45F}"/>
+                <a16:creationId xmlns:a16="http://schemas.microsoft.com/office/drawing/2014/main" id="{B714A7D0-79AC-4D9D-90FB-A63C6224D85B}"/>
               </a:ext>
             </a:extLst>
           </p:cNvPr>
@@ -3992,7 +3992,7 @@
           <p:cNvPr id="15" name="">
             <a:extLst xmlns:a="http://schemas.openxmlformats.org/drawingml/2006/main">
               <a:ext uri="{FF2B5EF4-FFF2-40B4-BE49-F238E27FC236}">
-                <a16:creationId xmlns:a16="http://schemas.microsoft.com/office/drawing/2014/main" id="{905DBE41-9CC0-45DA-B7EB-0045B0BED953}"/>
+                <a16:creationId xmlns:a16="http://schemas.microsoft.com/office/drawing/2014/main" id="{2B609630-F301-4345-85E8-4985C27A361C}"/>
               </a:ext>
             </a:extLst>
           </p:cNvPr>
@@ -4026,7 +4026,7 @@
           <p:cNvPr id="16" name="">
             <a:extLst xmlns:a="http://schemas.openxmlformats.org/drawingml/2006/main">
               <a:ext uri="{FF2B5EF4-FFF2-40B4-BE49-F238E27FC236}">
-                <a16:creationId xmlns:a16="http://schemas.microsoft.com/office/drawing/2014/main" id="{99A88C91-F692-40AD-BEC7-7BD3B0415639}"/>
+                <a16:creationId xmlns:a16="http://schemas.microsoft.com/office/drawing/2014/main" id="{64636C9C-74EB-429C-93A8-04E28C2C1BCE}"/>
               </a:ext>
             </a:extLst>
           </p:cNvPr>
@@ -4083,7 +4083,7 @@
           <p:cNvPr id="17" name="">
             <a:extLst xmlns:a="http://schemas.openxmlformats.org/drawingml/2006/main">
               <a:ext uri="{FF2B5EF4-FFF2-40B4-BE49-F238E27FC236}">
-                <a16:creationId xmlns:a16="http://schemas.microsoft.com/office/drawing/2014/main" id="{AB6D9B1B-EF4F-4B21-8DB0-B37B454E4DA1}"/>
+                <a16:creationId xmlns:a16="http://schemas.microsoft.com/office/drawing/2014/main" id="{04363BC2-C451-4E2C-ADB1-FC494987F67B}"/>
               </a:ext>
             </a:extLst>
           </p:cNvPr>
@@ -4140,7 +4140,7 @@
           <p:cNvPr id="18" name="">
             <a:extLst xmlns:a="http://schemas.openxmlformats.org/drawingml/2006/main">
               <a:ext uri="{FF2B5EF4-FFF2-40B4-BE49-F238E27FC236}">
-                <a16:creationId xmlns:a16="http://schemas.microsoft.com/office/drawing/2014/main" id="{52913BF2-CCC8-406F-951A-0DEFFA1FEFD5}"/>
+                <a16:creationId xmlns:a16="http://schemas.microsoft.com/office/drawing/2014/main" id="{20DB8B5C-6A4D-4D13-9458-864900673F36}"/>
               </a:ext>
             </a:extLst>
           </p:cNvPr>
@@ -4195,7 +4195,7 @@
     </p:spTree>
     <p:extLst>
       <p:ext uri="{BB962C8B-B14F-4D97-AF65-F5344CB8AC3E}">
-        <p14:creationId xmlns:p14="http://schemas.microsoft.com/office/powerpoint/2010/main" val="2071561233"/>
+        <p14:creationId xmlns:p14="http://schemas.microsoft.com/office/powerpoint/2010/main" val="1961709964"/>
       </p:ext>
     </p:extLst>
   </p:cSld>
@@ -4350,7 +4350,7 @@
           <p:cNvPr id="23" name="">
             <a:extLst xmlns:a="http://schemas.openxmlformats.org/drawingml/2006/main">
               <a:ext uri="{FF2B5EF4-FFF2-40B4-BE49-F238E27FC236}">
-                <a16:creationId xmlns:a16="http://schemas.microsoft.com/office/drawing/2014/main" id="{5CD60907-853F-4A30-82E1-8469AE5EFB57}"/>
+                <a16:creationId xmlns:a16="http://schemas.microsoft.com/office/drawing/2014/main" id="{4F3CCDDB-E5B3-47CD-8D6A-5CAF7250F974}"/>
               </a:ext>
             </a:extLst>
           </p:cNvPr>
@@ -4382,7 +4382,7 @@
           <p:cNvPr id="2" name="">
             <a:extLst xmlns:a="http://schemas.openxmlformats.org/drawingml/2006/main">
               <a:ext uri="{FF2B5EF4-FFF2-40B4-BE49-F238E27FC236}">
-                <a16:creationId xmlns:a16="http://schemas.microsoft.com/office/drawing/2014/main" id="{97C9B043-F459-489C-A1A6-EF8A63BFA4D0}"/>
+                <a16:creationId xmlns:a16="http://schemas.microsoft.com/office/drawing/2014/main" id="{C66FA80E-22B8-4901-AA91-88DC653813A0}"/>
               </a:ext>
             </a:extLst>
           </p:cNvPr>
@@ -4439,7 +4439,7 @@
           <p:cNvPr id="3" name="">
             <a:extLst xmlns:a="http://schemas.openxmlformats.org/drawingml/2006/main">
               <a:ext uri="{FF2B5EF4-FFF2-40B4-BE49-F238E27FC236}">
-                <a16:creationId xmlns:a16="http://schemas.microsoft.com/office/drawing/2014/main" id="{AA415ECC-7E72-4E2B-BFC5-7C0274A5C5E9}"/>
+                <a16:creationId xmlns:a16="http://schemas.microsoft.com/office/drawing/2014/main" id="{95A8A82E-E21F-472C-8FFD-DA9BE0888F65}"/>
               </a:ext>
             </a:extLst>
           </p:cNvPr>
@@ -4471,7 +4471,7 @@
           <p:cNvPr id="4" name="">
             <a:extLst xmlns:a="http://schemas.openxmlformats.org/drawingml/2006/main">
               <a:ext uri="{FF2B5EF4-FFF2-40B4-BE49-F238E27FC236}">
-                <a16:creationId xmlns:a16="http://schemas.microsoft.com/office/drawing/2014/main" id="{3DA6B36F-E0D9-4CD3-8CF6-195DCCE11A08}"/>
+                <a16:creationId xmlns:a16="http://schemas.microsoft.com/office/drawing/2014/main" id="{F8E03921-2104-47D3-8CB6-40F96C0C7A0C}"/>
               </a:ext>
             </a:extLst>
           </p:cNvPr>
@@ -4528,7 +4528,7 @@
           <p:cNvPr id="5" name="">
             <a:extLst xmlns:a="http://schemas.openxmlformats.org/drawingml/2006/main">
               <a:ext uri="{FF2B5EF4-FFF2-40B4-BE49-F238E27FC236}">
-                <a16:creationId xmlns:a16="http://schemas.microsoft.com/office/drawing/2014/main" id="{B7191C92-DBE5-43B8-9CB8-2DBF103C8CEE}"/>
+                <a16:creationId xmlns:a16="http://schemas.microsoft.com/office/drawing/2014/main" id="{9BD878CE-4644-4186-B951-816B7FE82C07}"/>
               </a:ext>
             </a:extLst>
           </p:cNvPr>
@@ -4585,7 +4585,7 @@
           <p:cNvPr id="6" name="">
             <a:extLst xmlns:a="http://schemas.openxmlformats.org/drawingml/2006/main">
               <a:ext uri="{FF2B5EF4-FFF2-40B4-BE49-F238E27FC236}">
-                <a16:creationId xmlns:a16="http://schemas.microsoft.com/office/drawing/2014/main" id="{FD08A4BF-243B-47FA-8010-A5F9E0193DBD}"/>
+                <a16:creationId xmlns:a16="http://schemas.microsoft.com/office/drawing/2014/main" id="{B7E07769-D6C1-4C69-9B3C-EC6C4842E829}"/>
               </a:ext>
             </a:extLst>
           </p:cNvPr>
@@ -4642,7 +4642,7 @@
           <p:cNvPr id="7" name="">
             <a:extLst xmlns:a="http://schemas.openxmlformats.org/drawingml/2006/main">
               <a:ext uri="{FF2B5EF4-FFF2-40B4-BE49-F238E27FC236}">
-                <a16:creationId xmlns:a16="http://schemas.microsoft.com/office/drawing/2014/main" id="{95B63B91-F60A-40EC-B183-EB4556A41261}"/>
+                <a16:creationId xmlns:a16="http://schemas.microsoft.com/office/drawing/2014/main" id="{963C66DC-1E2E-45C3-BB89-E115864B519B}"/>
               </a:ext>
             </a:extLst>
           </p:cNvPr>
@@ -4674,7 +4674,7 @@
           <p:cNvPr id="8" name="">
             <a:extLst xmlns:a="http://schemas.openxmlformats.org/drawingml/2006/main">
               <a:ext uri="{FF2B5EF4-FFF2-40B4-BE49-F238E27FC236}">
-                <a16:creationId xmlns:a16="http://schemas.microsoft.com/office/drawing/2014/main" id="{31A40795-6D64-44C2-B0C5-B6A3A4A7ED02}"/>
+                <a16:creationId xmlns:a16="http://schemas.microsoft.com/office/drawing/2014/main" id="{BB46492D-12D0-4791-9772-2691F0F9DC2A}"/>
               </a:ext>
             </a:extLst>
           </p:cNvPr>
@@ -4731,7 +4731,7 @@
           <p:cNvPr id="9" name="">
             <a:extLst xmlns:a="http://schemas.openxmlformats.org/drawingml/2006/main">
               <a:ext uri="{FF2B5EF4-FFF2-40B4-BE49-F238E27FC236}">
-                <a16:creationId xmlns:a16="http://schemas.microsoft.com/office/drawing/2014/main" id="{DC6FCC38-1234-4DEE-A321-B8A48FF96166}"/>
+                <a16:creationId xmlns:a16="http://schemas.microsoft.com/office/drawing/2014/main" id="{287929C0-C640-4638-B171-6473A6EBDD35}"/>
               </a:ext>
             </a:extLst>
           </p:cNvPr>
@@ -4788,7 +4788,7 @@
           <p:cNvPr id="10" name="">
             <a:extLst xmlns:a="http://schemas.openxmlformats.org/drawingml/2006/main">
               <a:ext uri="{FF2B5EF4-FFF2-40B4-BE49-F238E27FC236}">
-                <a16:creationId xmlns:a16="http://schemas.microsoft.com/office/drawing/2014/main" id="{958CF804-E531-4F5C-9E80-A168DCEDFC78}"/>
+                <a16:creationId xmlns:a16="http://schemas.microsoft.com/office/drawing/2014/main" id="{C99DF349-8BB3-4A76-ACC0-C1883AD233A1}"/>
               </a:ext>
             </a:extLst>
           </p:cNvPr>
@@ -4822,7 +4822,7 @@
           <p:cNvPr id="11" name="">
             <a:extLst xmlns:a="http://schemas.openxmlformats.org/drawingml/2006/main">
               <a:ext uri="{FF2B5EF4-FFF2-40B4-BE49-F238E27FC236}">
-                <a16:creationId xmlns:a16="http://schemas.microsoft.com/office/drawing/2014/main" id="{0CF4A355-1BD4-489B-B1EF-BD88A3451FBC}"/>
+                <a16:creationId xmlns:a16="http://schemas.microsoft.com/office/drawing/2014/main" id="{B4C5D647-8B73-4670-96A9-A981C4500567}"/>
               </a:ext>
             </a:extLst>
           </p:cNvPr>
@@ -4854,7 +4854,7 @@
           <p:cNvPr id="12" name="">
             <a:extLst xmlns:a="http://schemas.openxmlformats.org/drawingml/2006/main">
               <a:ext uri="{FF2B5EF4-FFF2-40B4-BE49-F238E27FC236}">
-                <a16:creationId xmlns:a16="http://schemas.microsoft.com/office/drawing/2014/main" id="{46243DB0-9D57-4328-BCFB-98DA3D84A2DD}"/>
+                <a16:creationId xmlns:a16="http://schemas.microsoft.com/office/drawing/2014/main" id="{D4476EFB-5832-40D7-A6F4-C60A8285219A}"/>
               </a:ext>
             </a:extLst>
           </p:cNvPr>
@@ -4911,7 +4911,7 @@
           <p:cNvPr id="13" name="">
             <a:extLst xmlns:a="http://schemas.openxmlformats.org/drawingml/2006/main">
               <a:ext uri="{FF2B5EF4-FFF2-40B4-BE49-F238E27FC236}">
-                <a16:creationId xmlns:a16="http://schemas.microsoft.com/office/drawing/2014/main" id="{5A27ED36-F402-41F6-8678-CDC8DBE0FF94}"/>
+                <a16:creationId xmlns:a16="http://schemas.microsoft.com/office/drawing/2014/main" id="{FEFD1C75-751A-4D23-A913-A0D7354BD191}"/>
               </a:ext>
             </a:extLst>
           </p:cNvPr>
@@ -4968,7 +4968,7 @@
           <p:cNvPr id="14" name="">
             <a:extLst xmlns:a="http://schemas.openxmlformats.org/drawingml/2006/main">
               <a:ext uri="{FF2B5EF4-FFF2-40B4-BE49-F238E27FC236}">
-                <a16:creationId xmlns:a16="http://schemas.microsoft.com/office/drawing/2014/main" id="{B1827661-8AE2-449E-9661-BEECB791761F}"/>
+                <a16:creationId xmlns:a16="http://schemas.microsoft.com/office/drawing/2014/main" id="{6009EE33-6E65-4BD8-B3B5-4D48D99409DC}"/>
               </a:ext>
             </a:extLst>
           </p:cNvPr>
@@ -5002,7 +5002,7 @@
           <p:cNvPr id="15" name="">
             <a:extLst xmlns:a="http://schemas.openxmlformats.org/drawingml/2006/main">
               <a:ext uri="{FF2B5EF4-FFF2-40B4-BE49-F238E27FC236}">
-                <a16:creationId xmlns:a16="http://schemas.microsoft.com/office/drawing/2014/main" id="{761AEB45-8495-48A4-AC32-0AFCF12DBAC3}"/>
+                <a16:creationId xmlns:a16="http://schemas.microsoft.com/office/drawing/2014/main" id="{63D278B6-555C-4BD8-AA0C-4872A1048ADD}"/>
               </a:ext>
             </a:extLst>
           </p:cNvPr>
@@ -5034,7 +5034,7 @@
           <p:cNvPr id="16" name="">
             <a:extLst xmlns:a="http://schemas.openxmlformats.org/drawingml/2006/main">
               <a:ext uri="{FF2B5EF4-FFF2-40B4-BE49-F238E27FC236}">
-                <a16:creationId xmlns:a16="http://schemas.microsoft.com/office/drawing/2014/main" id="{087E1B9C-1BCD-4212-8751-DD4BF6F30A96}"/>
+                <a16:creationId xmlns:a16="http://schemas.microsoft.com/office/drawing/2014/main" id="{4C4C1514-23DB-415F-88DB-684E883627FE}"/>
               </a:ext>
             </a:extLst>
           </p:cNvPr>
@@ -5091,7 +5091,7 @@
           <p:cNvPr id="17" name="">
             <a:extLst xmlns:a="http://schemas.openxmlformats.org/drawingml/2006/main">
               <a:ext uri="{FF2B5EF4-FFF2-40B4-BE49-F238E27FC236}">
-                <a16:creationId xmlns:a16="http://schemas.microsoft.com/office/drawing/2014/main" id="{9AD052A3-C6E9-430E-81F9-708AD092AEB7}"/>
+                <a16:creationId xmlns:a16="http://schemas.microsoft.com/office/drawing/2014/main" id="{0F60307B-3442-4EE4-BE37-336B3EC19597}"/>
               </a:ext>
             </a:extLst>
           </p:cNvPr>
@@ -5148,7 +5148,7 @@
           <p:cNvPr id="18" name="">
             <a:extLst xmlns:a="http://schemas.openxmlformats.org/drawingml/2006/main">
               <a:ext uri="{FF2B5EF4-FFF2-40B4-BE49-F238E27FC236}">
-                <a16:creationId xmlns:a16="http://schemas.microsoft.com/office/drawing/2014/main" id="{AB44DF4C-7F5B-47E0-9E37-E9ED26D64D0F}"/>
+                <a16:creationId xmlns:a16="http://schemas.microsoft.com/office/drawing/2014/main" id="{E24EACD4-DF60-4ECA-9C58-CD3D9A6EB59A}"/>
               </a:ext>
             </a:extLst>
           </p:cNvPr>
@@ -5182,7 +5182,7 @@
           <p:cNvPr id="19" name="">
             <a:extLst xmlns:a="http://schemas.openxmlformats.org/drawingml/2006/main">
               <a:ext uri="{FF2B5EF4-FFF2-40B4-BE49-F238E27FC236}">
-                <a16:creationId xmlns:a16="http://schemas.microsoft.com/office/drawing/2014/main" id="{17D0924F-F5D7-4C78-8D43-F37407955D97}"/>
+                <a16:creationId xmlns:a16="http://schemas.microsoft.com/office/drawing/2014/main" id="{047A1F70-D8F4-45A8-AF8D-280D646DF734}"/>
               </a:ext>
             </a:extLst>
           </p:cNvPr>
@@ -5214,7 +5214,7 @@
           <p:cNvPr id="20" name="">
             <a:extLst xmlns:a="http://schemas.openxmlformats.org/drawingml/2006/main">
               <a:ext uri="{FF2B5EF4-FFF2-40B4-BE49-F238E27FC236}">
-                <a16:creationId xmlns:a16="http://schemas.microsoft.com/office/drawing/2014/main" id="{FA296CD5-2B30-40AF-9B09-6F57E350667C}"/>
+                <a16:creationId xmlns:a16="http://schemas.microsoft.com/office/drawing/2014/main" id="{BF7FDB16-D9FB-437B-BDFA-E660A1FA7EF3}"/>
               </a:ext>
             </a:extLst>
           </p:cNvPr>
@@ -5271,7 +5271,7 @@
           <p:cNvPr id="21" name="">
             <a:extLst xmlns:a="http://schemas.openxmlformats.org/drawingml/2006/main">
               <a:ext uri="{FF2B5EF4-FFF2-40B4-BE49-F238E27FC236}">
-                <a16:creationId xmlns:a16="http://schemas.microsoft.com/office/drawing/2014/main" id="{FDEAB8D3-7253-471A-9C33-0D7F9401EABF}"/>
+                <a16:creationId xmlns:a16="http://schemas.microsoft.com/office/drawing/2014/main" id="{42370595-A24D-47CD-BEA8-D707ACFB6EFD}"/>
               </a:ext>
             </a:extLst>
           </p:cNvPr>
@@ -5328,7 +5328,7 @@
           <p:cNvPr id="22" name="">
             <a:extLst xmlns:a="http://schemas.openxmlformats.org/drawingml/2006/main">
               <a:ext uri="{FF2B5EF4-FFF2-40B4-BE49-F238E27FC236}">
-                <a16:creationId xmlns:a16="http://schemas.microsoft.com/office/drawing/2014/main" id="{E9107FCD-49FA-4193-8F68-0D661B4D8803}"/>
+                <a16:creationId xmlns:a16="http://schemas.microsoft.com/office/drawing/2014/main" id="{8C1817AE-11AD-472E-992B-3B6DBC426FE8}"/>
               </a:ext>
             </a:extLst>
           </p:cNvPr>
@@ -5383,7 +5383,7 @@
     </p:spTree>
     <p:extLst>
       <p:ext uri="{BB962C8B-B14F-4D97-AF65-F5344CB8AC3E}">
-        <p14:creationId xmlns:p14="http://schemas.microsoft.com/office/powerpoint/2010/main" val="1616328573"/>
+        <p14:creationId xmlns:p14="http://schemas.microsoft.com/office/powerpoint/2010/main" val="1658861881"/>
       </p:ext>
     </p:extLst>
   </p:cSld>
@@ -5584,7 +5584,7 @@
           <p:cNvPr id="23" name="">
             <a:extLst xmlns:a="http://schemas.openxmlformats.org/drawingml/2006/main">
               <a:ext uri="{FF2B5EF4-FFF2-40B4-BE49-F238E27FC236}">
-                <a16:creationId xmlns:a16="http://schemas.microsoft.com/office/drawing/2014/main" id="{2857A669-9B21-4075-9186-6E0AAF824B6A}"/>
+                <a16:creationId xmlns:a16="http://schemas.microsoft.com/office/drawing/2014/main" id="{DEDA5026-5E45-4238-BC27-4FAC77998FA5}"/>
               </a:ext>
             </a:extLst>
           </p:cNvPr>
@@ -5616,7 +5616,7 @@
           <p:cNvPr id="2" name="">
             <a:extLst xmlns:a="http://schemas.openxmlformats.org/drawingml/2006/main">
               <a:ext uri="{FF2B5EF4-FFF2-40B4-BE49-F238E27FC236}">
-                <a16:creationId xmlns:a16="http://schemas.microsoft.com/office/drawing/2014/main" id="{D766CC08-FC60-4922-A4C0-53BB148E92CE}"/>
+                <a16:creationId xmlns:a16="http://schemas.microsoft.com/office/drawing/2014/main" id="{64C30840-365C-42A1-B7BA-5A31B39906FC}"/>
               </a:ext>
             </a:extLst>
           </p:cNvPr>
@@ -5673,7 +5673,7 @@
           <p:cNvPr id="3" name="">
             <a:extLst xmlns:a="http://schemas.openxmlformats.org/drawingml/2006/main">
               <a:ext uri="{FF2B5EF4-FFF2-40B4-BE49-F238E27FC236}">
-                <a16:creationId xmlns:a16="http://schemas.microsoft.com/office/drawing/2014/main" id="{FB3A8AF7-3B10-4D9D-9369-0DF791BC3803}"/>
+                <a16:creationId xmlns:a16="http://schemas.microsoft.com/office/drawing/2014/main" id="{6B636A4A-32CA-491D-9DBD-AFCFED74653F}"/>
               </a:ext>
             </a:extLst>
           </p:cNvPr>
@@ -5705,7 +5705,7 @@
           <p:cNvPr id="4" name="">
             <a:extLst xmlns:a="http://schemas.openxmlformats.org/drawingml/2006/main">
               <a:ext uri="{FF2B5EF4-FFF2-40B4-BE49-F238E27FC236}">
-                <a16:creationId xmlns:a16="http://schemas.microsoft.com/office/drawing/2014/main" id="{C70E7DED-E874-4C08-926F-909A793DCBF5}"/>
+                <a16:creationId xmlns:a16="http://schemas.microsoft.com/office/drawing/2014/main" id="{FFAA63A0-3144-4E73-9423-A60B0093EC49}"/>
               </a:ext>
             </a:extLst>
           </p:cNvPr>
@@ -5762,7 +5762,7 @@
           <p:cNvPr id="5" name="">
             <a:extLst xmlns:a="http://schemas.openxmlformats.org/drawingml/2006/main">
               <a:ext uri="{FF2B5EF4-FFF2-40B4-BE49-F238E27FC236}">
-                <a16:creationId xmlns:a16="http://schemas.microsoft.com/office/drawing/2014/main" id="{05535C9A-298D-4A66-B781-D0E272E71FA5}"/>
+                <a16:creationId xmlns:a16="http://schemas.microsoft.com/office/drawing/2014/main" id="{C330B78D-CEF3-4C2A-AB57-B26D59DE30E4}"/>
               </a:ext>
             </a:extLst>
           </p:cNvPr>
@@ -5819,7 +5819,7 @@
           <p:cNvPr id="6" name="">
             <a:extLst xmlns:a="http://schemas.openxmlformats.org/drawingml/2006/main">
               <a:ext uri="{FF2B5EF4-FFF2-40B4-BE49-F238E27FC236}">
-                <a16:creationId xmlns:a16="http://schemas.microsoft.com/office/drawing/2014/main" id="{43899454-ED8F-47EF-8C75-AB710AAAB7F1}"/>
+                <a16:creationId xmlns:a16="http://schemas.microsoft.com/office/drawing/2014/main" id="{591553E6-DEB5-4F4F-9335-24DF924CD554}"/>
               </a:ext>
             </a:extLst>
           </p:cNvPr>
@@ -5876,7 +5876,7 @@
           <p:cNvPr id="7" name="">
             <a:extLst xmlns:a="http://schemas.openxmlformats.org/drawingml/2006/main">
               <a:ext uri="{FF2B5EF4-FFF2-40B4-BE49-F238E27FC236}">
-                <a16:creationId xmlns:a16="http://schemas.microsoft.com/office/drawing/2014/main" id="{C1A175D8-97AE-4C5C-88BF-D341D43F37C9}"/>
+                <a16:creationId xmlns:a16="http://schemas.microsoft.com/office/drawing/2014/main" id="{8D075E0F-F49B-42F6-A94E-B75D9F4601C6}"/>
               </a:ext>
             </a:extLst>
           </p:cNvPr>
@@ -5908,7 +5908,7 @@
           <p:cNvPr id="8" name="">
             <a:extLst xmlns:a="http://schemas.openxmlformats.org/drawingml/2006/main">
               <a:ext uri="{FF2B5EF4-FFF2-40B4-BE49-F238E27FC236}">
-                <a16:creationId xmlns:a16="http://schemas.microsoft.com/office/drawing/2014/main" id="{0445E3CA-5652-4B69-B3BD-945B36F59BA6}"/>
+                <a16:creationId xmlns:a16="http://schemas.microsoft.com/office/drawing/2014/main" id="{4BAC3585-431E-408C-8130-19A123B46F2A}"/>
               </a:ext>
             </a:extLst>
           </p:cNvPr>
@@ -5965,7 +5965,7 @@
           <p:cNvPr id="9" name="">
             <a:extLst xmlns:a="http://schemas.openxmlformats.org/drawingml/2006/main">
               <a:ext uri="{FF2B5EF4-FFF2-40B4-BE49-F238E27FC236}">
-                <a16:creationId xmlns:a16="http://schemas.microsoft.com/office/drawing/2014/main" id="{027D4028-9E5E-47CD-87F5-E52798A565D4}"/>
+                <a16:creationId xmlns:a16="http://schemas.microsoft.com/office/drawing/2014/main" id="{CEA58CD9-8F9C-4BB5-94C9-A5C218515C4D}"/>
               </a:ext>
             </a:extLst>
           </p:cNvPr>
@@ -6022,7 +6022,7 @@
           <p:cNvPr id="10" name="">
             <a:extLst xmlns:a="http://schemas.openxmlformats.org/drawingml/2006/main">
               <a:ext uri="{FF2B5EF4-FFF2-40B4-BE49-F238E27FC236}">
-                <a16:creationId xmlns:a16="http://schemas.microsoft.com/office/drawing/2014/main" id="{5860C1EE-3AE9-4E7A-A566-9C2F902B5C48}"/>
+                <a16:creationId xmlns:a16="http://schemas.microsoft.com/office/drawing/2014/main" id="{3FBFBD6B-9C29-4BB5-9A98-6F9A33CE67FD}"/>
               </a:ext>
             </a:extLst>
           </p:cNvPr>
@@ -6056,7 +6056,7 @@
           <p:cNvPr id="11" name="">
             <a:extLst xmlns:a="http://schemas.openxmlformats.org/drawingml/2006/main">
               <a:ext uri="{FF2B5EF4-FFF2-40B4-BE49-F238E27FC236}">
-                <a16:creationId xmlns:a16="http://schemas.microsoft.com/office/drawing/2014/main" id="{4A6EC8A3-D655-40B0-88AC-0F160DC4B7E5}"/>
+                <a16:creationId xmlns:a16="http://schemas.microsoft.com/office/drawing/2014/main" id="{99C2D469-B380-4ACD-991F-4849DD587606}"/>
               </a:ext>
             </a:extLst>
           </p:cNvPr>
@@ -6088,7 +6088,7 @@
           <p:cNvPr id="12" name="">
             <a:extLst xmlns:a="http://schemas.openxmlformats.org/drawingml/2006/main">
               <a:ext uri="{FF2B5EF4-FFF2-40B4-BE49-F238E27FC236}">
-                <a16:creationId xmlns:a16="http://schemas.microsoft.com/office/drawing/2014/main" id="{0A026435-A025-4765-B6C1-E609A13F21C8}"/>
+                <a16:creationId xmlns:a16="http://schemas.microsoft.com/office/drawing/2014/main" id="{0668F998-3445-41DF-9839-D8AA20779B86}"/>
               </a:ext>
             </a:extLst>
           </p:cNvPr>
@@ -6145,7 +6145,7 @@
           <p:cNvPr id="13" name="">
             <a:extLst xmlns:a="http://schemas.openxmlformats.org/drawingml/2006/main">
               <a:ext uri="{FF2B5EF4-FFF2-40B4-BE49-F238E27FC236}">
-                <a16:creationId xmlns:a16="http://schemas.microsoft.com/office/drawing/2014/main" id="{6E52A8CA-1D29-4327-B12F-35ED934ABB1E}"/>
+                <a16:creationId xmlns:a16="http://schemas.microsoft.com/office/drawing/2014/main" id="{3143F5F6-2E2F-4E57-8E0B-CEFD581CC622}"/>
               </a:ext>
             </a:extLst>
           </p:cNvPr>
@@ -6202,7 +6202,7 @@
           <p:cNvPr id="14" name="">
             <a:extLst xmlns:a="http://schemas.openxmlformats.org/drawingml/2006/main">
               <a:ext uri="{FF2B5EF4-FFF2-40B4-BE49-F238E27FC236}">
-                <a16:creationId xmlns:a16="http://schemas.microsoft.com/office/drawing/2014/main" id="{73CD8503-6DEA-41BF-925A-D9B336CC114A}"/>
+                <a16:creationId xmlns:a16="http://schemas.microsoft.com/office/drawing/2014/main" id="{9F0CE89A-06B9-491B-88BB-DB632FCCA54D}"/>
               </a:ext>
             </a:extLst>
           </p:cNvPr>
@@ -6236,7 +6236,7 @@
           <p:cNvPr id="15" name="">
             <a:extLst xmlns:a="http://schemas.openxmlformats.org/drawingml/2006/main">
               <a:ext uri="{FF2B5EF4-FFF2-40B4-BE49-F238E27FC236}">
-                <a16:creationId xmlns:a16="http://schemas.microsoft.com/office/drawing/2014/main" id="{851AB99A-99A2-4C25-9A20-FA3E3A2F360D}"/>
+                <a16:creationId xmlns:a16="http://schemas.microsoft.com/office/drawing/2014/main" id="{75B3EF99-CBE4-4E3F-9AE8-3BC0E9AACD0D}"/>
               </a:ext>
             </a:extLst>
           </p:cNvPr>
@@ -6268,7 +6268,7 @@
           <p:cNvPr id="16" name="">
             <a:extLst xmlns:a="http://schemas.openxmlformats.org/drawingml/2006/main">
               <a:ext uri="{FF2B5EF4-FFF2-40B4-BE49-F238E27FC236}">
-                <a16:creationId xmlns:a16="http://schemas.microsoft.com/office/drawing/2014/main" id="{DD88BD05-4086-43BB-888B-C0DFA77D52F5}"/>
+                <a16:creationId xmlns:a16="http://schemas.microsoft.com/office/drawing/2014/main" id="{4D4D50BB-BD7D-4384-9DFE-2B7FC85ED341}"/>
               </a:ext>
             </a:extLst>
           </p:cNvPr>
@@ -6325,7 +6325,7 @@
           <p:cNvPr id="17" name="">
             <a:extLst xmlns:a="http://schemas.openxmlformats.org/drawingml/2006/main">
               <a:ext uri="{FF2B5EF4-FFF2-40B4-BE49-F238E27FC236}">
-                <a16:creationId xmlns:a16="http://schemas.microsoft.com/office/drawing/2014/main" id="{73AAAD43-CACD-43A2-9B3F-3A28A9384D7A}"/>
+                <a16:creationId xmlns:a16="http://schemas.microsoft.com/office/drawing/2014/main" id="{B8979334-2D02-48B8-9118-38943B53260D}"/>
               </a:ext>
             </a:extLst>
           </p:cNvPr>
@@ -6382,7 +6382,7 @@
           <p:cNvPr id="18" name="">
             <a:extLst xmlns:a="http://schemas.openxmlformats.org/drawingml/2006/main">
               <a:ext uri="{FF2B5EF4-FFF2-40B4-BE49-F238E27FC236}">
-                <a16:creationId xmlns:a16="http://schemas.microsoft.com/office/drawing/2014/main" id="{D2FEE12D-EEB5-49AB-B26E-22C3CE8527C8}"/>
+                <a16:creationId xmlns:a16="http://schemas.microsoft.com/office/drawing/2014/main" id="{44DB25F2-E547-4D52-B72A-399B4C796A81}"/>
               </a:ext>
             </a:extLst>
           </p:cNvPr>
@@ -6416,7 +6416,7 @@
           <p:cNvPr id="19" name="">
             <a:extLst xmlns:a="http://schemas.openxmlformats.org/drawingml/2006/main">
               <a:ext uri="{FF2B5EF4-FFF2-40B4-BE49-F238E27FC236}">
-                <a16:creationId xmlns:a16="http://schemas.microsoft.com/office/drawing/2014/main" id="{40442459-6593-49F7-A866-EA8A2EE1F57F}"/>
+                <a16:creationId xmlns:a16="http://schemas.microsoft.com/office/drawing/2014/main" id="{9066D5A8-05A9-44C6-B02B-1556D6E604E3}"/>
               </a:ext>
             </a:extLst>
           </p:cNvPr>
@@ -6448,7 +6448,7 @@
           <p:cNvPr id="20" name="">
             <a:extLst xmlns:a="http://schemas.openxmlformats.org/drawingml/2006/main">
               <a:ext uri="{FF2B5EF4-FFF2-40B4-BE49-F238E27FC236}">
-                <a16:creationId xmlns:a16="http://schemas.microsoft.com/office/drawing/2014/main" id="{9A406349-F7C7-4EC8-B94C-0852DCFD48FD}"/>
+                <a16:creationId xmlns:a16="http://schemas.microsoft.com/office/drawing/2014/main" id="{E72E9950-CD28-4B72-BA77-A5690A13110F}"/>
               </a:ext>
             </a:extLst>
           </p:cNvPr>
@@ -6505,7 +6505,7 @@
           <p:cNvPr id="21" name="">
             <a:extLst xmlns:a="http://schemas.openxmlformats.org/drawingml/2006/main">
               <a:ext uri="{FF2B5EF4-FFF2-40B4-BE49-F238E27FC236}">
-                <a16:creationId xmlns:a16="http://schemas.microsoft.com/office/drawing/2014/main" id="{71C3B223-E057-44E2-ADE4-88264146A92C}"/>
+                <a16:creationId xmlns:a16="http://schemas.microsoft.com/office/drawing/2014/main" id="{02F0E646-8515-4A5F-9975-6F5370C9BB74}"/>
               </a:ext>
             </a:extLst>
           </p:cNvPr>
@@ -6562,7 +6562,7 @@
           <p:cNvPr id="22" name="">
             <a:extLst xmlns:a="http://schemas.openxmlformats.org/drawingml/2006/main">
               <a:ext uri="{FF2B5EF4-FFF2-40B4-BE49-F238E27FC236}">
-                <a16:creationId xmlns:a16="http://schemas.microsoft.com/office/drawing/2014/main" id="{35BE4FEB-1FC5-440E-B357-6D5D0E3BD448}"/>
+                <a16:creationId xmlns:a16="http://schemas.microsoft.com/office/drawing/2014/main" id="{B696615D-3D07-4763-83E7-08A5D6FDA7BB}"/>
               </a:ext>
             </a:extLst>
           </p:cNvPr>
@@ -6617,7 +6617,7 @@
     </p:spTree>
     <p:extLst>
       <p:ext uri="{BB962C8B-B14F-4D97-AF65-F5344CB8AC3E}">
-        <p14:creationId xmlns:p14="http://schemas.microsoft.com/office/powerpoint/2010/main" val="68372170"/>
+        <p14:creationId xmlns:p14="http://schemas.microsoft.com/office/powerpoint/2010/main" val="1208475417"/>
       </p:ext>
     </p:extLst>
   </p:cSld>
@@ -6818,7 +6818,7 @@
           <p:cNvPr id="16" name="">
             <a:extLst xmlns:a="http://schemas.openxmlformats.org/drawingml/2006/main">
               <a:ext uri="{FF2B5EF4-FFF2-40B4-BE49-F238E27FC236}">
-                <a16:creationId xmlns:a16="http://schemas.microsoft.com/office/drawing/2014/main" id="{FAC42808-691E-4A18-9201-44D53647468B}"/>
+                <a16:creationId xmlns:a16="http://schemas.microsoft.com/office/drawing/2014/main" id="{BD83A739-5ABA-4651-87AF-699D6055D1FD}"/>
               </a:ext>
             </a:extLst>
           </p:cNvPr>
@@ -6850,7 +6850,7 @@
           <p:cNvPr id="2" name="">
             <a:extLst xmlns:a="http://schemas.openxmlformats.org/drawingml/2006/main">
               <a:ext uri="{FF2B5EF4-FFF2-40B4-BE49-F238E27FC236}">
-                <a16:creationId xmlns:a16="http://schemas.microsoft.com/office/drawing/2014/main" id="{D03C91F0-FDEB-4D2C-9A2F-C32D500AFAF5}"/>
+                <a16:creationId xmlns:a16="http://schemas.microsoft.com/office/drawing/2014/main" id="{DD42C4AD-165E-4905-8936-9952151F985D}"/>
               </a:ext>
             </a:extLst>
           </p:cNvPr>
@@ -6907,7 +6907,7 @@
           <p:cNvPr id="3" name="">
             <a:extLst xmlns:a="http://schemas.openxmlformats.org/drawingml/2006/main">
               <a:ext uri="{FF2B5EF4-FFF2-40B4-BE49-F238E27FC236}">
-                <a16:creationId xmlns:a16="http://schemas.microsoft.com/office/drawing/2014/main" id="{1D53605F-7FF3-4B2A-A433-7DED4DD77751}"/>
+                <a16:creationId xmlns:a16="http://schemas.microsoft.com/office/drawing/2014/main" id="{166E09B0-2BE6-464F-A3C7-7650CB71AA59}"/>
               </a:ext>
             </a:extLst>
           </p:cNvPr>
@@ -6939,7 +6939,7 @@
           <p:cNvPr id="4" name="">
             <a:extLst xmlns:a="http://schemas.openxmlformats.org/drawingml/2006/main">
               <a:ext uri="{FF2B5EF4-FFF2-40B4-BE49-F238E27FC236}">
-                <a16:creationId xmlns:a16="http://schemas.microsoft.com/office/drawing/2014/main" id="{1FD6A137-DEB4-4F87-83A8-2FFD8A3AD8A8}"/>
+                <a16:creationId xmlns:a16="http://schemas.microsoft.com/office/drawing/2014/main" id="{EAD68CFA-4510-442D-8DB8-A50AC683832B}"/>
               </a:ext>
             </a:extLst>
           </p:cNvPr>
@@ -6996,7 +6996,7 @@
           <p:cNvPr id="5" name="">
             <a:extLst xmlns:a="http://schemas.openxmlformats.org/drawingml/2006/main">
               <a:ext uri="{FF2B5EF4-FFF2-40B4-BE49-F238E27FC236}">
-                <a16:creationId xmlns:a16="http://schemas.microsoft.com/office/drawing/2014/main" id="{7E016F49-BD4D-40FE-A152-51ED2BAEAAFC}"/>
+                <a16:creationId xmlns:a16="http://schemas.microsoft.com/office/drawing/2014/main" id="{9415C796-DA64-4B39-9A99-ADDB3D76B795}"/>
               </a:ext>
             </a:extLst>
           </p:cNvPr>
@@ -7053,7 +7053,7 @@
           <p:cNvPr id="6" name="">
             <a:extLst xmlns:a="http://schemas.openxmlformats.org/drawingml/2006/main">
               <a:ext uri="{FF2B5EF4-FFF2-40B4-BE49-F238E27FC236}">
-                <a16:creationId xmlns:a16="http://schemas.microsoft.com/office/drawing/2014/main" id="{44DD3095-F279-49E0-B7B0-98ADF9392BF2}"/>
+                <a16:creationId xmlns:a16="http://schemas.microsoft.com/office/drawing/2014/main" id="{C5F2A101-04E1-4F60-8323-1BD97F5CDDA3}"/>
               </a:ext>
             </a:extLst>
           </p:cNvPr>
@@ -7110,7 +7110,7 @@
           <p:cNvPr id="7" name="">
             <a:extLst xmlns:a="http://schemas.openxmlformats.org/drawingml/2006/main">
               <a:ext uri="{FF2B5EF4-FFF2-40B4-BE49-F238E27FC236}">
-                <a16:creationId xmlns:a16="http://schemas.microsoft.com/office/drawing/2014/main" id="{E3FD647D-C4D0-42C7-AEE2-B4DF31F88C45}"/>
+                <a16:creationId xmlns:a16="http://schemas.microsoft.com/office/drawing/2014/main" id="{08DA0178-54CE-41B4-8972-59B129F8F6BC}"/>
               </a:ext>
             </a:extLst>
           </p:cNvPr>
@@ -7142,7 +7142,7 @@
           <p:cNvPr id="8" name="">
             <a:extLst xmlns:a="http://schemas.openxmlformats.org/drawingml/2006/main">
               <a:ext uri="{FF2B5EF4-FFF2-40B4-BE49-F238E27FC236}">
-                <a16:creationId xmlns:a16="http://schemas.microsoft.com/office/drawing/2014/main" id="{FDBB0412-CD36-4801-96B7-D4CA720807AD}"/>
+                <a16:creationId xmlns:a16="http://schemas.microsoft.com/office/drawing/2014/main" id="{6C3D3B2F-3085-40C1-8755-303EE548444D}"/>
               </a:ext>
             </a:extLst>
           </p:cNvPr>
@@ -7199,7 +7199,7 @@
           <p:cNvPr id="9" name="">
             <a:extLst xmlns:a="http://schemas.openxmlformats.org/drawingml/2006/main">
               <a:ext uri="{FF2B5EF4-FFF2-40B4-BE49-F238E27FC236}">
-                <a16:creationId xmlns:a16="http://schemas.microsoft.com/office/drawing/2014/main" id="{4278F293-E4D4-4077-8144-30E182D2D990}"/>
+                <a16:creationId xmlns:a16="http://schemas.microsoft.com/office/drawing/2014/main" id="{A628C9EC-00BE-4326-B0F7-824DF49153C6}"/>
               </a:ext>
             </a:extLst>
           </p:cNvPr>
@@ -7256,7 +7256,7 @@
           <p:cNvPr id="10" name="">
             <a:extLst xmlns:a="http://schemas.openxmlformats.org/drawingml/2006/main">
               <a:ext uri="{FF2B5EF4-FFF2-40B4-BE49-F238E27FC236}">
-                <a16:creationId xmlns:a16="http://schemas.microsoft.com/office/drawing/2014/main" id="{A9B5442A-52DE-47D0-80BF-7E630954A102}"/>
+                <a16:creationId xmlns:a16="http://schemas.microsoft.com/office/drawing/2014/main" id="{0B28AB64-674F-4AE9-BFFA-81A7682CFC26}"/>
               </a:ext>
             </a:extLst>
           </p:cNvPr>
@@ -7313,7 +7313,7 @@
           <p:cNvPr id="11" name="">
             <a:extLst xmlns:a="http://schemas.openxmlformats.org/drawingml/2006/main">
               <a:ext uri="{FF2B5EF4-FFF2-40B4-BE49-F238E27FC236}">
-                <a16:creationId xmlns:a16="http://schemas.microsoft.com/office/drawing/2014/main" id="{33CD6929-2D80-4607-B6B7-3BDC4A7C7EFF}"/>
+                <a16:creationId xmlns:a16="http://schemas.microsoft.com/office/drawing/2014/main" id="{1E346D45-E813-4F89-9E26-DC8CEFF7D3CD}"/>
               </a:ext>
             </a:extLst>
           </p:cNvPr>
@@ -7345,7 +7345,7 @@
           <p:cNvPr id="12" name="">
             <a:extLst xmlns:a="http://schemas.openxmlformats.org/drawingml/2006/main">
               <a:ext uri="{FF2B5EF4-FFF2-40B4-BE49-F238E27FC236}">
-                <a16:creationId xmlns:a16="http://schemas.microsoft.com/office/drawing/2014/main" id="{627701ED-AFAB-4042-9FFF-C22539945C36}"/>
+                <a16:creationId xmlns:a16="http://schemas.microsoft.com/office/drawing/2014/main" id="{D34E2A04-2B46-4584-93DF-5FDC0BF6093D}"/>
               </a:ext>
             </a:extLst>
           </p:cNvPr>
@@ -7402,7 +7402,7 @@
           <p:cNvPr id="13" name="">
             <a:extLst xmlns:a="http://schemas.openxmlformats.org/drawingml/2006/main">
               <a:ext uri="{FF2B5EF4-FFF2-40B4-BE49-F238E27FC236}">
-                <a16:creationId xmlns:a16="http://schemas.microsoft.com/office/drawing/2014/main" id="{7ABB36CE-DB2A-45CF-9D86-8DF85F10DB9F}"/>
+                <a16:creationId xmlns:a16="http://schemas.microsoft.com/office/drawing/2014/main" id="{C4CBEEE3-91C0-49B7-816A-774B8889FB64}"/>
               </a:ext>
             </a:extLst>
           </p:cNvPr>
@@ -7459,7 +7459,7 @@
           <p:cNvPr id="14" name="">
             <a:extLst xmlns:a="http://schemas.openxmlformats.org/drawingml/2006/main">
               <a:ext uri="{FF2B5EF4-FFF2-40B4-BE49-F238E27FC236}">
-                <a16:creationId xmlns:a16="http://schemas.microsoft.com/office/drawing/2014/main" id="{DE1023BB-3A7A-4F82-948F-FCF204F7DBC8}"/>
+                <a16:creationId xmlns:a16="http://schemas.microsoft.com/office/drawing/2014/main" id="{61969C26-3E59-48B9-A343-07416188B1D3}"/>
               </a:ext>
             </a:extLst>
           </p:cNvPr>
@@ -7516,7 +7516,7 @@
           <p:cNvPr id="15" name="">
             <a:extLst xmlns:a="http://schemas.openxmlformats.org/drawingml/2006/main">
               <a:ext uri="{FF2B5EF4-FFF2-40B4-BE49-F238E27FC236}">
-                <a16:creationId xmlns:a16="http://schemas.microsoft.com/office/drawing/2014/main" id="{03EF214F-B115-47CC-9A3A-26BD5776E87E}"/>
+                <a16:creationId xmlns:a16="http://schemas.microsoft.com/office/drawing/2014/main" id="{B801A872-80EA-4AB0-98E3-2DDB97FDDA56}"/>
               </a:ext>
             </a:extLst>
           </p:cNvPr>
@@ -7571,7 +7571,7 @@
     </p:spTree>
     <p:extLst>
       <p:ext uri="{BB962C8B-B14F-4D97-AF65-F5344CB8AC3E}">
-        <p14:creationId xmlns:p14="http://schemas.microsoft.com/office/powerpoint/2010/main" val="914185462"/>
+        <p14:creationId xmlns:p14="http://schemas.microsoft.com/office/powerpoint/2010/main" val="1193055623"/>
       </p:ext>
     </p:extLst>
   </p:cSld>
@@ -7772,7 +7772,7 @@
           <p:cNvPr id="23" name="">
             <a:extLst xmlns:a="http://schemas.openxmlformats.org/drawingml/2006/main">
               <a:ext uri="{FF2B5EF4-FFF2-40B4-BE49-F238E27FC236}">
-                <a16:creationId xmlns:a16="http://schemas.microsoft.com/office/drawing/2014/main" id="{50DA4FA6-07AC-4101-8E44-B6EC028A1923}"/>
+                <a16:creationId xmlns:a16="http://schemas.microsoft.com/office/drawing/2014/main" id="{961F4409-5474-4F33-B3A9-CAD7E0C625DB}"/>
               </a:ext>
             </a:extLst>
           </p:cNvPr>
@@ -7804,7 +7804,7 @@
           <p:cNvPr id="2" name="">
             <a:extLst xmlns:a="http://schemas.openxmlformats.org/drawingml/2006/main">
               <a:ext uri="{FF2B5EF4-FFF2-40B4-BE49-F238E27FC236}">
-                <a16:creationId xmlns:a16="http://schemas.microsoft.com/office/drawing/2014/main" id="{AAD8BDD5-BE93-4EE7-9D3F-869EBF786052}"/>
+                <a16:creationId xmlns:a16="http://schemas.microsoft.com/office/drawing/2014/main" id="{2525C1E9-E09B-4496-9C6E-4989ED055116}"/>
               </a:ext>
             </a:extLst>
           </p:cNvPr>
@@ -7861,7 +7861,7 @@
           <p:cNvPr id="3" name="">
             <a:extLst xmlns:a="http://schemas.openxmlformats.org/drawingml/2006/main">
               <a:ext uri="{FF2B5EF4-FFF2-40B4-BE49-F238E27FC236}">
-                <a16:creationId xmlns:a16="http://schemas.microsoft.com/office/drawing/2014/main" id="{068F9B8D-F260-4BED-9FEE-629C58AB7DC4}"/>
+                <a16:creationId xmlns:a16="http://schemas.microsoft.com/office/drawing/2014/main" id="{447BDE2F-3CF9-4AA0-A7E5-88F140086FCF}"/>
               </a:ext>
             </a:extLst>
           </p:cNvPr>
@@ -7893,7 +7893,7 @@
           <p:cNvPr id="4" name="">
             <a:extLst xmlns:a="http://schemas.openxmlformats.org/drawingml/2006/main">
               <a:ext uri="{FF2B5EF4-FFF2-40B4-BE49-F238E27FC236}">
-                <a16:creationId xmlns:a16="http://schemas.microsoft.com/office/drawing/2014/main" id="{585DD697-3D27-43BA-BB00-E510924FC67C}"/>
+                <a16:creationId xmlns:a16="http://schemas.microsoft.com/office/drawing/2014/main" id="{15BC5654-F9BA-4731-8902-D4D200E58761}"/>
               </a:ext>
             </a:extLst>
           </p:cNvPr>
@@ -7950,7 +7950,7 @@
           <p:cNvPr id="5" name="">
             <a:extLst xmlns:a="http://schemas.openxmlformats.org/drawingml/2006/main">
               <a:ext uri="{FF2B5EF4-FFF2-40B4-BE49-F238E27FC236}">
-                <a16:creationId xmlns:a16="http://schemas.microsoft.com/office/drawing/2014/main" id="{0372134B-6F18-4742-BBE7-E10F8F9455FC}"/>
+                <a16:creationId xmlns:a16="http://schemas.microsoft.com/office/drawing/2014/main" id="{E73354C3-DE6E-4F8A-8952-759004B8F078}"/>
               </a:ext>
             </a:extLst>
           </p:cNvPr>
@@ -8007,7 +8007,7 @@
           <p:cNvPr id="6" name="">
             <a:extLst xmlns:a="http://schemas.openxmlformats.org/drawingml/2006/main">
               <a:ext uri="{FF2B5EF4-FFF2-40B4-BE49-F238E27FC236}">
-                <a16:creationId xmlns:a16="http://schemas.microsoft.com/office/drawing/2014/main" id="{FD62FB4D-3CF0-4064-A484-854E05247362}"/>
+                <a16:creationId xmlns:a16="http://schemas.microsoft.com/office/drawing/2014/main" id="{8C0D8C95-AFE4-4075-B2B0-3F041DC33145}"/>
               </a:ext>
             </a:extLst>
           </p:cNvPr>
@@ -8064,7 +8064,7 @@
           <p:cNvPr id="7" name="">
             <a:extLst xmlns:a="http://schemas.openxmlformats.org/drawingml/2006/main">
               <a:ext uri="{FF2B5EF4-FFF2-40B4-BE49-F238E27FC236}">
-                <a16:creationId xmlns:a16="http://schemas.microsoft.com/office/drawing/2014/main" id="{70EDC665-AA43-4F94-B845-EC0E905306BA}"/>
+                <a16:creationId xmlns:a16="http://schemas.microsoft.com/office/drawing/2014/main" id="{4D7835A1-1483-47DD-8DF6-919AB3A1C107}"/>
               </a:ext>
             </a:extLst>
           </p:cNvPr>
@@ -8096,7 +8096,7 @@
           <p:cNvPr id="8" name="">
             <a:extLst xmlns:a="http://schemas.openxmlformats.org/drawingml/2006/main">
               <a:ext uri="{FF2B5EF4-FFF2-40B4-BE49-F238E27FC236}">
-                <a16:creationId xmlns:a16="http://schemas.microsoft.com/office/drawing/2014/main" id="{358B5EAC-7AE9-47C7-8122-874BBB524ED3}"/>
+                <a16:creationId xmlns:a16="http://schemas.microsoft.com/office/drawing/2014/main" id="{88F21743-9D30-4C93-9E91-7BC52BD008E7}"/>
               </a:ext>
             </a:extLst>
           </p:cNvPr>
@@ -8153,7 +8153,7 @@
           <p:cNvPr id="9" name="">
             <a:extLst xmlns:a="http://schemas.openxmlformats.org/drawingml/2006/main">
               <a:ext uri="{FF2B5EF4-FFF2-40B4-BE49-F238E27FC236}">
-                <a16:creationId xmlns:a16="http://schemas.microsoft.com/office/drawing/2014/main" id="{D4BC9F64-E5B9-4585-96E8-74E324E7C2D4}"/>
+                <a16:creationId xmlns:a16="http://schemas.microsoft.com/office/drawing/2014/main" id="{C53CB9E4-2B45-49D5-B755-F98343BF818B}"/>
               </a:ext>
             </a:extLst>
           </p:cNvPr>
@@ -8210,19 +8210,19 @@
           <p:cNvPr id="10" name="">
             <a:extLst xmlns:a="http://schemas.openxmlformats.org/drawingml/2006/main">
               <a:ext uri="{FF2B5EF4-FFF2-40B4-BE49-F238E27FC236}">
-                <a16:creationId xmlns:a16="http://schemas.microsoft.com/office/drawing/2014/main" id="{F23FB171-2D4E-4D29-BFD7-3E319889702D}"/>
-              </a:ext>
-            </a:extLst>
-          </p:cNvPr>
-          <p:cNvSpPr>
-            <a:spLocks xmlns:a="http://schemas.openxmlformats.org/drawingml/2006/main" noGrp="1"/>
-          </p:cNvSpPr>
-          <p:nvPr/>
-        </p:nvSpPr>
-        <p:spPr>
-          <a:xfrm xmlns:a="http://schemas.openxmlformats.org/drawingml/2006/main">
-            <a:off x="914400" y="1257300"/>
-            <a:ext cx="10363200" cy="781050"/>
+                <a16:creationId xmlns:a16="http://schemas.microsoft.com/office/drawing/2014/main" id="{A3ECB204-14A2-4B88-99D3-F261832C0084}"/>
+              </a:ext>
+            </a:extLst>
+          </p:cNvPr>
+          <p:cNvSpPr>
+            <a:spLocks xmlns:a="http://schemas.openxmlformats.org/drawingml/2006/main" noGrp="1"/>
+          </p:cNvSpPr>
+          <p:nvPr/>
+        </p:nvSpPr>
+        <p:spPr>
+          <a:xfrm xmlns:a="http://schemas.openxmlformats.org/drawingml/2006/main">
+            <a:off x="857250" y="1219200"/>
+            <a:ext cx="10477500" cy="742950"/>
           </a:xfrm>
           <a:prstGeom xmlns:a="http://schemas.openxmlformats.org/drawingml/2006/main" prst="rect">
             <a:avLst/>
@@ -8239,7 +8239,7 @@
           <a:lstStyle xmlns:a="http://schemas.openxmlformats.org/drawingml/2006/main"/>
           <a:p xmlns:a="http://schemas.openxmlformats.org/drawingml/2006/main">
             <a:pPr algn="ctr">
-              <a:defRPr sz="2175" b="1">
+              <a:defRPr sz="2100" b="1">
                 <a:solidFill>
                   <a:srgbClr val="17253A"/>
                 </a:solidFill>
@@ -8249,7 +8249,7 @@
               </a:defRPr>
             </a:pPr>
             <a:r>
-              <a:rPr sz="2175" b="1">
+              <a:rPr sz="2100" b="1">
                 <a:solidFill>
                   <a:srgbClr val="17253A"/>
                 </a:solidFill>
@@ -8267,28 +8267,30 @@
           <p:cNvPr id="11" name="">
             <a:extLst xmlns:a="http://schemas.openxmlformats.org/drawingml/2006/main">
               <a:ext uri="{FF2B5EF4-FFF2-40B4-BE49-F238E27FC236}">
-                <a16:creationId xmlns:a16="http://schemas.microsoft.com/office/drawing/2014/main" id="{824DFFCA-7C4E-4047-B104-268B17CB12B2}"/>
-              </a:ext>
-            </a:extLst>
-          </p:cNvPr>
-          <p:cNvSpPr>
-            <a:spLocks xmlns:a="http://schemas.openxmlformats.org/drawingml/2006/main" noGrp="1"/>
-          </p:cNvSpPr>
-          <p:nvPr/>
-        </p:nvSpPr>
-        <p:spPr>
-          <a:xfrm xmlns:a="http://schemas.openxmlformats.org/drawingml/2006/main">
-            <a:off x="1000125" y="2247900"/>
-            <a:ext cx="476250" cy="476250"/>
-          </a:xfrm>
-          <a:prstGeom xmlns:a="http://schemas.openxmlformats.org/drawingml/2006/main" prst="ellipse">
+                <a16:creationId xmlns:a16="http://schemas.microsoft.com/office/drawing/2014/main" id="{CEA63F32-33F6-4F97-AC33-A8E9297D3A99}"/>
+              </a:ext>
+            </a:extLst>
+          </p:cNvPr>
+          <p:cNvSpPr>
+            <a:spLocks xmlns:a="http://schemas.openxmlformats.org/drawingml/2006/main" noGrp="1"/>
+          </p:cNvSpPr>
+          <p:nvPr/>
+        </p:nvSpPr>
+        <p:spPr>
+          <a:xfrm xmlns:a="http://schemas.openxmlformats.org/drawingml/2006/main">
+            <a:off x="971550" y="2124075"/>
+            <a:ext cx="38100" cy="3524250"/>
+          </a:xfrm>
+          <a:prstGeom xmlns:a="http://schemas.openxmlformats.org/drawingml/2006/main" prst="rect">
             <a:avLst/>
           </a:prstGeom>
           <a:solidFill xmlns:a="http://schemas.openxmlformats.org/drawingml/2006/main">
-            <a:srgbClr val="18324A"/>
+            <a:srgbClr val="2C6E73"/>
           </a:solidFill>
           <a:ln xmlns:a="http://schemas.openxmlformats.org/drawingml/2006/main" w="0">
-            <a:noFill/>
+            <a:solidFill>
+              <a:srgbClr val="2C6E73"/>
+            </a:solidFill>
           </a:ln>
         </p:spPr>
       </p:sp>
@@ -8297,19 +8299,19 @@
           <p:cNvPr id="12" name="">
             <a:extLst xmlns:a="http://schemas.openxmlformats.org/drawingml/2006/main">
               <a:ext uri="{FF2B5EF4-FFF2-40B4-BE49-F238E27FC236}">
-                <a16:creationId xmlns:a16="http://schemas.microsoft.com/office/drawing/2014/main" id="{F5776C74-1FDF-4278-81E0-14ABCE4EA0E4}"/>
-              </a:ext>
-            </a:extLst>
-          </p:cNvPr>
-          <p:cNvSpPr>
-            <a:spLocks xmlns:a="http://schemas.openxmlformats.org/drawingml/2006/main" noGrp="1"/>
-          </p:cNvSpPr>
-          <p:nvPr/>
-        </p:nvSpPr>
-        <p:spPr>
-          <a:xfrm xmlns:a="http://schemas.openxmlformats.org/drawingml/2006/main">
-            <a:off x="1000125" y="2276475"/>
-            <a:ext cx="476250" cy="419100"/>
+                <a16:creationId xmlns:a16="http://schemas.microsoft.com/office/drawing/2014/main" id="{1E631BF9-9970-4D8B-8DC9-6B30A3B92ECE}"/>
+              </a:ext>
+            </a:extLst>
+          </p:cNvPr>
+          <p:cNvSpPr>
+            <a:spLocks xmlns:a="http://schemas.openxmlformats.org/drawingml/2006/main" noGrp="1"/>
+          </p:cNvSpPr>
+          <p:nvPr/>
+        </p:nvSpPr>
+        <p:spPr>
+          <a:xfrm xmlns:a="http://schemas.openxmlformats.org/drawingml/2006/main">
+            <a:off x="1162050" y="2200275"/>
+            <a:ext cx="400050" cy="400050"/>
           </a:xfrm>
           <a:prstGeom xmlns:a="http://schemas.openxmlformats.org/drawingml/2006/main" prst="rect">
             <a:avLst/>
@@ -8326,9 +8328,9 @@
           <a:lstStyle xmlns:a="http://schemas.openxmlformats.org/drawingml/2006/main"/>
           <a:p xmlns:a="http://schemas.openxmlformats.org/drawingml/2006/main">
             <a:pPr algn="ctr">
-              <a:defRPr sz="1350" b="1">
-                <a:solidFill>
-                  <a:srgbClr val="FFFFFF"/>
+              <a:defRPr sz="1125" b="1">
+                <a:solidFill>
+                  <a:srgbClr val="2C6E73"/>
                 </a:solidFill>
                 <a:latin typeface="Arial"/>
                 <a:ea typeface="Arial"/>
@@ -8336,9 +8338,9 @@
               </a:defRPr>
             </a:pPr>
             <a:r>
-              <a:rPr sz="1350" b="1">
-                <a:solidFill>
-                  <a:srgbClr val="FFFFFF"/>
+              <a:rPr sz="1125" b="1">
+                <a:solidFill>
+                  <a:srgbClr val="2C6E73"/>
                 </a:solidFill>
                 <a:latin typeface="Arial"/>
                 <a:ea typeface="Arial"/>
@@ -8354,19 +8356,19 @@
           <p:cNvPr id="13" name="">
             <a:extLst xmlns:a="http://schemas.openxmlformats.org/drawingml/2006/main">
               <a:ext uri="{FF2B5EF4-FFF2-40B4-BE49-F238E27FC236}">
-                <a16:creationId xmlns:a16="http://schemas.microsoft.com/office/drawing/2014/main" id="{28B71FF4-3D74-4891-B872-C86426951652}"/>
-              </a:ext>
-            </a:extLst>
-          </p:cNvPr>
-          <p:cNvSpPr>
-            <a:spLocks xmlns:a="http://schemas.openxmlformats.org/drawingml/2006/main" noGrp="1"/>
-          </p:cNvSpPr>
-          <p:nvPr/>
-        </p:nvSpPr>
-        <p:spPr>
-          <a:xfrm xmlns:a="http://schemas.openxmlformats.org/drawingml/2006/main">
-            <a:off x="1714500" y="2181225"/>
-            <a:ext cx="9429750" cy="609600"/>
+                <a16:creationId xmlns:a16="http://schemas.microsoft.com/office/drawing/2014/main" id="{CA110A6E-8B79-4B73-8591-43054285E16E}"/>
+              </a:ext>
+            </a:extLst>
+          </p:cNvPr>
+          <p:cNvSpPr>
+            <a:spLocks xmlns:a="http://schemas.openxmlformats.org/drawingml/2006/main" noGrp="1"/>
+          </p:cNvSpPr>
+          <p:nvPr/>
+        </p:nvSpPr>
+        <p:spPr>
+          <a:xfrm xmlns:a="http://schemas.openxmlformats.org/drawingml/2006/main">
+            <a:off x="1714500" y="2114550"/>
+            <a:ext cx="9525000" cy="809625"/>
           </a:xfrm>
           <a:prstGeom xmlns:a="http://schemas.openxmlformats.org/drawingml/2006/main" prst="rect">
             <a:avLst/>
@@ -8383,7 +8385,7 @@
           <a:lstStyle xmlns:a="http://schemas.openxmlformats.org/drawingml/2006/main"/>
           <a:p xmlns:a="http://schemas.openxmlformats.org/drawingml/2006/main">
             <a:pPr algn="l">
-              <a:defRPr sz="1500" b="0">
+              <a:defRPr sz="1725" b="0">
                 <a:solidFill>
                   <a:srgbClr val="17253A"/>
                 </a:solidFill>
@@ -8393,7 +8395,7 @@
               </a:defRPr>
             </a:pPr>
             <a:r>
-              <a:rPr sz="1500" b="0">
+              <a:rPr sz="1725" b="0">
                 <a:solidFill>
                   <a:srgbClr val="17253A"/>
                 </a:solidFill>
@@ -8401,7 +8403,7 @@
                 <a:ea typeface="Arial"/>
                 <a:cs typeface="Arial"/>
               </a:rPr>
-              <a:t>Identify the structure: Identify the required measure and mark the relevant lengths.</a:t>
+              <a:t>Rectangle area = 10 × 6 = 60 cm²</a:t>
             </a:r>
           </a:p>
         </p:txBody>
@@ -8411,28 +8413,30 @@
           <p:cNvPr id="14" name="">
             <a:extLst xmlns:a="http://schemas.openxmlformats.org/drawingml/2006/main">
               <a:ext uri="{FF2B5EF4-FFF2-40B4-BE49-F238E27FC236}">
-                <a16:creationId xmlns:a16="http://schemas.microsoft.com/office/drawing/2014/main" id="{CA8CDBCE-B37F-4F68-9F90-D56663D0C540}"/>
-              </a:ext>
-            </a:extLst>
-          </p:cNvPr>
-          <p:cNvSpPr>
-            <a:spLocks xmlns:a="http://schemas.openxmlformats.org/drawingml/2006/main" noGrp="1"/>
-          </p:cNvSpPr>
-          <p:nvPr/>
-        </p:nvSpPr>
-        <p:spPr>
-          <a:xfrm xmlns:a="http://schemas.openxmlformats.org/drawingml/2006/main">
-            <a:off x="1000125" y="2990850"/>
-            <a:ext cx="476250" cy="476250"/>
-          </a:xfrm>
-          <a:prstGeom xmlns:a="http://schemas.openxmlformats.org/drawingml/2006/main" prst="ellipse">
+                <a16:creationId xmlns:a16="http://schemas.microsoft.com/office/drawing/2014/main" id="{F4B831EF-6537-4637-BECE-358C4D9E6FE0}"/>
+              </a:ext>
+            </a:extLst>
+          </p:cNvPr>
+          <p:cNvSpPr>
+            <a:spLocks xmlns:a="http://schemas.openxmlformats.org/drawingml/2006/main" noGrp="1"/>
+          </p:cNvSpPr>
+          <p:nvPr/>
+        </p:nvSpPr>
+        <p:spPr>
+          <a:xfrm xmlns:a="http://schemas.openxmlformats.org/drawingml/2006/main">
+            <a:off x="1714500" y="2943225"/>
+            <a:ext cx="9334500" cy="9525"/>
+          </a:xfrm>
+          <a:prstGeom xmlns:a="http://schemas.openxmlformats.org/drawingml/2006/main" prst="rect">
             <a:avLst/>
           </a:prstGeom>
           <a:solidFill xmlns:a="http://schemas.openxmlformats.org/drawingml/2006/main">
-            <a:srgbClr val="2C6E73"/>
+            <a:srgbClr val="D9E0E6"/>
           </a:solidFill>
           <a:ln xmlns:a="http://schemas.openxmlformats.org/drawingml/2006/main" w="0">
-            <a:noFill/>
+            <a:solidFill>
+              <a:srgbClr val="D9E0E6"/>
+            </a:solidFill>
           </a:ln>
         </p:spPr>
       </p:sp>
@@ -8441,19 +8445,19 @@
           <p:cNvPr id="15" name="">
             <a:extLst xmlns:a="http://schemas.openxmlformats.org/drawingml/2006/main">
               <a:ext uri="{FF2B5EF4-FFF2-40B4-BE49-F238E27FC236}">
-                <a16:creationId xmlns:a16="http://schemas.microsoft.com/office/drawing/2014/main" id="{604BB0B0-548D-408D-86AD-8CDD3C05AB5C}"/>
-              </a:ext>
-            </a:extLst>
-          </p:cNvPr>
-          <p:cNvSpPr>
-            <a:spLocks xmlns:a="http://schemas.openxmlformats.org/drawingml/2006/main" noGrp="1"/>
-          </p:cNvSpPr>
-          <p:nvPr/>
-        </p:nvSpPr>
-        <p:spPr>
-          <a:xfrm xmlns:a="http://schemas.openxmlformats.org/drawingml/2006/main">
-            <a:off x="1000125" y="3019425"/>
-            <a:ext cx="476250" cy="419100"/>
+                <a16:creationId xmlns:a16="http://schemas.microsoft.com/office/drawing/2014/main" id="{21DACCE9-BCB3-4C5C-A833-5938D2ECB56B}"/>
+              </a:ext>
+            </a:extLst>
+          </p:cNvPr>
+          <p:cNvSpPr>
+            <a:spLocks xmlns:a="http://schemas.openxmlformats.org/drawingml/2006/main" noGrp="1"/>
+          </p:cNvSpPr>
+          <p:nvPr/>
+        </p:nvSpPr>
+        <p:spPr>
+          <a:xfrm xmlns:a="http://schemas.openxmlformats.org/drawingml/2006/main">
+            <a:off x="1162050" y="3076575"/>
+            <a:ext cx="400050" cy="400050"/>
           </a:xfrm>
           <a:prstGeom xmlns:a="http://schemas.openxmlformats.org/drawingml/2006/main" prst="rect">
             <a:avLst/>
@@ -8470,9 +8474,9 @@
           <a:lstStyle xmlns:a="http://schemas.openxmlformats.org/drawingml/2006/main"/>
           <a:p xmlns:a="http://schemas.openxmlformats.org/drawingml/2006/main">
             <a:pPr algn="ctr">
-              <a:defRPr sz="1350" b="1">
-                <a:solidFill>
-                  <a:srgbClr val="FFFFFF"/>
+              <a:defRPr sz="1125" b="1">
+                <a:solidFill>
+                  <a:srgbClr val="2C6E73"/>
                 </a:solidFill>
                 <a:latin typeface="Arial"/>
                 <a:ea typeface="Arial"/>
@@ -8480,9 +8484,9 @@
               </a:defRPr>
             </a:pPr>
             <a:r>
-              <a:rPr sz="1350" b="1">
-                <a:solidFill>
-                  <a:srgbClr val="FFFFFF"/>
+              <a:rPr sz="1125" b="1">
+                <a:solidFill>
+                  <a:srgbClr val="2C6E73"/>
                 </a:solidFill>
                 <a:latin typeface="Arial"/>
                 <a:ea typeface="Arial"/>
@@ -8498,19 +8502,19 @@
           <p:cNvPr id="16" name="">
             <a:extLst xmlns:a="http://schemas.openxmlformats.org/drawingml/2006/main">
               <a:ext uri="{FF2B5EF4-FFF2-40B4-BE49-F238E27FC236}">
-                <a16:creationId xmlns:a16="http://schemas.microsoft.com/office/drawing/2014/main" id="{FB52DA36-BC15-45AB-8C34-7A566239AAE0}"/>
-              </a:ext>
-            </a:extLst>
-          </p:cNvPr>
-          <p:cNvSpPr>
-            <a:spLocks xmlns:a="http://schemas.openxmlformats.org/drawingml/2006/main" noGrp="1"/>
-          </p:cNvSpPr>
-          <p:nvPr/>
-        </p:nvSpPr>
-        <p:spPr>
-          <a:xfrm xmlns:a="http://schemas.openxmlformats.org/drawingml/2006/main">
-            <a:off x="1714500" y="2924175"/>
-            <a:ext cx="9429750" cy="609600"/>
+                <a16:creationId xmlns:a16="http://schemas.microsoft.com/office/drawing/2014/main" id="{96C24F8C-AD98-4BA2-A345-40B14B0D5B77}"/>
+              </a:ext>
+            </a:extLst>
+          </p:cNvPr>
+          <p:cNvSpPr>
+            <a:spLocks xmlns:a="http://schemas.openxmlformats.org/drawingml/2006/main" noGrp="1"/>
+          </p:cNvSpPr>
+          <p:nvPr/>
+        </p:nvSpPr>
+        <p:spPr>
+          <a:xfrm xmlns:a="http://schemas.openxmlformats.org/drawingml/2006/main">
+            <a:off x="1714500" y="2990850"/>
+            <a:ext cx="9525000" cy="809625"/>
           </a:xfrm>
           <a:prstGeom xmlns:a="http://schemas.openxmlformats.org/drawingml/2006/main" prst="rect">
             <a:avLst/>
@@ -8527,7 +8531,7 @@
           <a:lstStyle xmlns:a="http://schemas.openxmlformats.org/drawingml/2006/main"/>
           <a:p xmlns:a="http://schemas.openxmlformats.org/drawingml/2006/main">
             <a:pPr algn="l">
-              <a:defRPr sz="1500" b="0">
+              <a:defRPr sz="1725" b="0">
                 <a:solidFill>
                   <a:srgbClr val="17253A"/>
                 </a:solidFill>
@@ -8537,7 +8541,7 @@
               </a:defRPr>
             </a:pPr>
             <a:r>
-              <a:rPr sz="1500" b="0">
+              <a:rPr sz="1725" b="0">
                 <a:solidFill>
                   <a:srgbClr val="17253A"/>
                 </a:solidFill>
@@ -8545,7 +8549,7 @@
                 <a:ea typeface="Arial"/>
                 <a:cs typeface="Arial"/>
               </a:rPr>
-              <a:t>Set up the method: Use the perpendicular height, not a sloping side, in the area formula.</a:t>
+              <a:t>Triangle area = 10 × 4 ÷ 2</a:t>
             </a:r>
           </a:p>
         </p:txBody>
@@ -8555,28 +8559,30 @@
           <p:cNvPr id="17" name="">
             <a:extLst xmlns:a="http://schemas.openxmlformats.org/drawingml/2006/main">
               <a:ext uri="{FF2B5EF4-FFF2-40B4-BE49-F238E27FC236}">
-                <a16:creationId xmlns:a16="http://schemas.microsoft.com/office/drawing/2014/main" id="{2828E323-5610-4013-80DF-32D00C6C602F}"/>
-              </a:ext>
-            </a:extLst>
-          </p:cNvPr>
-          <p:cNvSpPr>
-            <a:spLocks xmlns:a="http://schemas.openxmlformats.org/drawingml/2006/main" noGrp="1"/>
-          </p:cNvSpPr>
-          <p:nvPr/>
-        </p:nvSpPr>
-        <p:spPr>
-          <a:xfrm xmlns:a="http://schemas.openxmlformats.org/drawingml/2006/main">
-            <a:off x="1000125" y="3733800"/>
-            <a:ext cx="476250" cy="476250"/>
-          </a:xfrm>
-          <a:prstGeom xmlns:a="http://schemas.openxmlformats.org/drawingml/2006/main" prst="ellipse">
+                <a16:creationId xmlns:a16="http://schemas.microsoft.com/office/drawing/2014/main" id="{FB55F0E4-A617-4E53-8F26-E96000F971B1}"/>
+              </a:ext>
+            </a:extLst>
+          </p:cNvPr>
+          <p:cNvSpPr>
+            <a:spLocks xmlns:a="http://schemas.openxmlformats.org/drawingml/2006/main" noGrp="1"/>
+          </p:cNvSpPr>
+          <p:nvPr/>
+        </p:nvSpPr>
+        <p:spPr>
+          <a:xfrm xmlns:a="http://schemas.openxmlformats.org/drawingml/2006/main">
+            <a:off x="1714500" y="3819525"/>
+            <a:ext cx="9334500" cy="9525"/>
+          </a:xfrm>
+          <a:prstGeom xmlns:a="http://schemas.openxmlformats.org/drawingml/2006/main" prst="rect">
             <a:avLst/>
           </a:prstGeom>
           <a:solidFill xmlns:a="http://schemas.openxmlformats.org/drawingml/2006/main">
-            <a:srgbClr val="2C6E73"/>
+            <a:srgbClr val="D9E0E6"/>
           </a:solidFill>
           <a:ln xmlns:a="http://schemas.openxmlformats.org/drawingml/2006/main" w="0">
-            <a:noFill/>
+            <a:solidFill>
+              <a:srgbClr val="D9E0E6"/>
+            </a:solidFill>
           </a:ln>
         </p:spPr>
       </p:sp>
@@ -8585,19 +8591,19 @@
           <p:cNvPr id="18" name="">
             <a:extLst xmlns:a="http://schemas.openxmlformats.org/drawingml/2006/main">
               <a:ext uri="{FF2B5EF4-FFF2-40B4-BE49-F238E27FC236}">
-                <a16:creationId xmlns:a16="http://schemas.microsoft.com/office/drawing/2014/main" id="{478A3D86-630F-4330-98C8-1C9E47E33EFF}"/>
-              </a:ext>
-            </a:extLst>
-          </p:cNvPr>
-          <p:cNvSpPr>
-            <a:spLocks xmlns:a="http://schemas.openxmlformats.org/drawingml/2006/main" noGrp="1"/>
-          </p:cNvSpPr>
-          <p:nvPr/>
-        </p:nvSpPr>
-        <p:spPr>
-          <a:xfrm xmlns:a="http://schemas.openxmlformats.org/drawingml/2006/main">
-            <a:off x="1000125" y="3762375"/>
-            <a:ext cx="476250" cy="419100"/>
+                <a16:creationId xmlns:a16="http://schemas.microsoft.com/office/drawing/2014/main" id="{CB3FAA60-658B-43CF-B10D-6A028378D8AB}"/>
+              </a:ext>
+            </a:extLst>
+          </p:cNvPr>
+          <p:cNvSpPr>
+            <a:spLocks xmlns:a="http://schemas.openxmlformats.org/drawingml/2006/main" noGrp="1"/>
+          </p:cNvSpPr>
+          <p:nvPr/>
+        </p:nvSpPr>
+        <p:spPr>
+          <a:xfrm xmlns:a="http://schemas.openxmlformats.org/drawingml/2006/main">
+            <a:off x="1162050" y="3952875"/>
+            <a:ext cx="400050" cy="400050"/>
           </a:xfrm>
           <a:prstGeom xmlns:a="http://schemas.openxmlformats.org/drawingml/2006/main" prst="rect">
             <a:avLst/>
@@ -8614,9 +8620,9 @@
           <a:lstStyle xmlns:a="http://schemas.openxmlformats.org/drawingml/2006/main"/>
           <a:p xmlns:a="http://schemas.openxmlformats.org/drawingml/2006/main">
             <a:pPr algn="ctr">
-              <a:defRPr sz="1350" b="1">
-                <a:solidFill>
-                  <a:srgbClr val="FFFFFF"/>
+              <a:defRPr sz="1125" b="1">
+                <a:solidFill>
+                  <a:srgbClr val="2C6E73"/>
                 </a:solidFill>
                 <a:latin typeface="Arial"/>
                 <a:ea typeface="Arial"/>
@@ -8624,9 +8630,9 @@
               </a:defRPr>
             </a:pPr>
             <a:r>
-              <a:rPr sz="1350" b="1">
-                <a:solidFill>
-                  <a:srgbClr val="FFFFFF"/>
+              <a:rPr sz="1125" b="1">
+                <a:solidFill>
+                  <a:srgbClr val="2C6E73"/>
                 </a:solidFill>
                 <a:latin typeface="Arial"/>
                 <a:ea typeface="Arial"/>
@@ -8642,19 +8648,19 @@
           <p:cNvPr id="19" name="">
             <a:extLst xmlns:a="http://schemas.openxmlformats.org/drawingml/2006/main">
               <a:ext uri="{FF2B5EF4-FFF2-40B4-BE49-F238E27FC236}">
-                <a16:creationId xmlns:a16="http://schemas.microsoft.com/office/drawing/2014/main" id="{1EB02665-88EC-4255-86F9-DD4641D71779}"/>
-              </a:ext>
-            </a:extLst>
-          </p:cNvPr>
-          <p:cNvSpPr>
-            <a:spLocks xmlns:a="http://schemas.openxmlformats.org/drawingml/2006/main" noGrp="1"/>
-          </p:cNvSpPr>
-          <p:nvPr/>
-        </p:nvSpPr>
-        <p:spPr>
-          <a:xfrm xmlns:a="http://schemas.openxmlformats.org/drawingml/2006/main">
-            <a:off x="1714500" y="3667125"/>
-            <a:ext cx="9429750" cy="609600"/>
+                <a16:creationId xmlns:a16="http://schemas.microsoft.com/office/drawing/2014/main" id="{021CF51D-2D6E-4951-BB4D-B185780E5B0B}"/>
+              </a:ext>
+            </a:extLst>
+          </p:cNvPr>
+          <p:cNvSpPr>
+            <a:spLocks xmlns:a="http://schemas.openxmlformats.org/drawingml/2006/main" noGrp="1"/>
+          </p:cNvSpPr>
+          <p:nvPr/>
+        </p:nvSpPr>
+        <p:spPr>
+          <a:xfrm xmlns:a="http://schemas.openxmlformats.org/drawingml/2006/main">
+            <a:off x="1714500" y="3867150"/>
+            <a:ext cx="9525000" cy="809625"/>
           </a:xfrm>
           <a:prstGeom xmlns:a="http://schemas.openxmlformats.org/drawingml/2006/main" prst="rect">
             <a:avLst/>
@@ -8671,7 +8677,7 @@
           <a:lstStyle xmlns:a="http://schemas.openxmlformats.org/drawingml/2006/main"/>
           <a:p xmlns:a="http://schemas.openxmlformats.org/drawingml/2006/main">
             <a:pPr algn="l">
-              <a:defRPr sz="1500" b="0">
+              <a:defRPr sz="1725" b="0">
                 <a:solidFill>
                   <a:srgbClr val="17253A"/>
                 </a:solidFill>
@@ -8681,7 +8687,7 @@
               </a:defRPr>
             </a:pPr>
             <a:r>
-              <a:rPr sz="1500" b="0">
+              <a:rPr sz="1725" b="0">
                 <a:solidFill>
                   <a:srgbClr val="17253A"/>
                 </a:solidFill>
@@ -8689,7 +8695,7 @@
                 <a:ea typeface="Arial"/>
                 <a:cs typeface="Arial"/>
               </a:rPr>
-              <a:t>Complete the calculation: 80 cm2.</a:t>
+              <a:t>Triangle area = 20 cm²</a:t>
             </a:r>
           </a:p>
         </p:txBody>
@@ -8699,28 +8705,30 @@
           <p:cNvPr id="20" name="">
             <a:extLst xmlns:a="http://schemas.openxmlformats.org/drawingml/2006/main">
               <a:ext uri="{FF2B5EF4-FFF2-40B4-BE49-F238E27FC236}">
-                <a16:creationId xmlns:a16="http://schemas.microsoft.com/office/drawing/2014/main" id="{183A7846-E007-4229-AA5C-3CE766B6F139}"/>
-              </a:ext>
-            </a:extLst>
-          </p:cNvPr>
-          <p:cNvSpPr>
-            <a:spLocks xmlns:a="http://schemas.openxmlformats.org/drawingml/2006/main" noGrp="1"/>
-          </p:cNvSpPr>
-          <p:nvPr/>
-        </p:nvSpPr>
-        <p:spPr>
-          <a:xfrm xmlns:a="http://schemas.openxmlformats.org/drawingml/2006/main">
-            <a:off x="1000125" y="4476750"/>
-            <a:ext cx="476250" cy="476250"/>
-          </a:xfrm>
-          <a:prstGeom xmlns:a="http://schemas.openxmlformats.org/drawingml/2006/main" prst="ellipse">
+                <a16:creationId xmlns:a16="http://schemas.microsoft.com/office/drawing/2014/main" id="{DAA6D5D4-B7A5-4F16-890E-311A767A7BB4}"/>
+              </a:ext>
+            </a:extLst>
+          </p:cNvPr>
+          <p:cNvSpPr>
+            <a:spLocks xmlns:a="http://schemas.openxmlformats.org/drawingml/2006/main" noGrp="1"/>
+          </p:cNvSpPr>
+          <p:nvPr/>
+        </p:nvSpPr>
+        <p:spPr>
+          <a:xfrm xmlns:a="http://schemas.openxmlformats.org/drawingml/2006/main">
+            <a:off x="1714500" y="4695825"/>
+            <a:ext cx="9334500" cy="9525"/>
+          </a:xfrm>
+          <a:prstGeom xmlns:a="http://schemas.openxmlformats.org/drawingml/2006/main" prst="rect">
             <a:avLst/>
           </a:prstGeom>
           <a:solidFill xmlns:a="http://schemas.openxmlformats.org/drawingml/2006/main">
-            <a:srgbClr val="2C6E73"/>
+            <a:srgbClr val="D9E0E6"/>
           </a:solidFill>
           <a:ln xmlns:a="http://schemas.openxmlformats.org/drawingml/2006/main" w="0">
-            <a:noFill/>
+            <a:solidFill>
+              <a:srgbClr val="D9E0E6"/>
+            </a:solidFill>
           </a:ln>
         </p:spPr>
       </p:sp>
@@ -8729,19 +8737,19 @@
           <p:cNvPr id="21" name="">
             <a:extLst xmlns:a="http://schemas.openxmlformats.org/drawingml/2006/main">
               <a:ext uri="{FF2B5EF4-FFF2-40B4-BE49-F238E27FC236}">
-                <a16:creationId xmlns:a16="http://schemas.microsoft.com/office/drawing/2014/main" id="{3556EDB6-B59D-4530-BA48-6D2ED7821A69}"/>
-              </a:ext>
-            </a:extLst>
-          </p:cNvPr>
-          <p:cNvSpPr>
-            <a:spLocks xmlns:a="http://schemas.openxmlformats.org/drawingml/2006/main" noGrp="1"/>
-          </p:cNvSpPr>
-          <p:nvPr/>
-        </p:nvSpPr>
-        <p:spPr>
-          <a:xfrm xmlns:a="http://schemas.openxmlformats.org/drawingml/2006/main">
-            <a:off x="1000125" y="4505325"/>
-            <a:ext cx="476250" cy="419100"/>
+                <a16:creationId xmlns:a16="http://schemas.microsoft.com/office/drawing/2014/main" id="{04BD4E52-D784-4DCF-B215-1F3470C5E236}"/>
+              </a:ext>
+            </a:extLst>
+          </p:cNvPr>
+          <p:cNvSpPr>
+            <a:spLocks xmlns:a="http://schemas.openxmlformats.org/drawingml/2006/main" noGrp="1"/>
+          </p:cNvSpPr>
+          <p:nvPr/>
+        </p:nvSpPr>
+        <p:spPr>
+          <a:xfrm xmlns:a="http://schemas.openxmlformats.org/drawingml/2006/main">
+            <a:off x="1162050" y="4829175"/>
+            <a:ext cx="400050" cy="400050"/>
           </a:xfrm>
           <a:prstGeom xmlns:a="http://schemas.openxmlformats.org/drawingml/2006/main" prst="rect">
             <a:avLst/>
@@ -8758,9 +8766,9 @@
           <a:lstStyle xmlns:a="http://schemas.openxmlformats.org/drawingml/2006/main"/>
           <a:p xmlns:a="http://schemas.openxmlformats.org/drawingml/2006/main">
             <a:pPr algn="ctr">
-              <a:defRPr sz="1350" b="1">
-                <a:solidFill>
-                  <a:srgbClr val="FFFFFF"/>
+              <a:defRPr sz="1125" b="1">
+                <a:solidFill>
+                  <a:srgbClr val="2F785D"/>
                 </a:solidFill>
                 <a:latin typeface="Arial"/>
                 <a:ea typeface="Arial"/>
@@ -8768,9 +8776,9 @@
               </a:defRPr>
             </a:pPr>
             <a:r>
-              <a:rPr sz="1350" b="1">
-                <a:solidFill>
-                  <a:srgbClr val="FFFFFF"/>
+              <a:rPr sz="1125" b="1">
+                <a:solidFill>
+                  <a:srgbClr val="2F785D"/>
                 </a:solidFill>
                 <a:latin typeface="Arial"/>
                 <a:ea typeface="Arial"/>
@@ -8786,19 +8794,19 @@
           <p:cNvPr id="22" name="">
             <a:extLst xmlns:a="http://schemas.openxmlformats.org/drawingml/2006/main">
               <a:ext uri="{FF2B5EF4-FFF2-40B4-BE49-F238E27FC236}">
-                <a16:creationId xmlns:a16="http://schemas.microsoft.com/office/drawing/2014/main" id="{3B26953D-4C7C-4CE0-8E20-938B2A007FE2}"/>
-              </a:ext>
-            </a:extLst>
-          </p:cNvPr>
-          <p:cNvSpPr>
-            <a:spLocks xmlns:a="http://schemas.openxmlformats.org/drawingml/2006/main" noGrp="1"/>
-          </p:cNvSpPr>
-          <p:nvPr/>
-        </p:nvSpPr>
-        <p:spPr>
-          <a:xfrm xmlns:a="http://schemas.openxmlformats.org/drawingml/2006/main">
-            <a:off x="1714500" y="4410075"/>
-            <a:ext cx="9429750" cy="609600"/>
+                <a16:creationId xmlns:a16="http://schemas.microsoft.com/office/drawing/2014/main" id="{4589F14D-A02C-45CE-9B0C-51DF6FA3896B}"/>
+              </a:ext>
+            </a:extLst>
+          </p:cNvPr>
+          <p:cNvSpPr>
+            <a:spLocks xmlns:a="http://schemas.openxmlformats.org/drawingml/2006/main" noGrp="1"/>
+          </p:cNvSpPr>
+          <p:nvPr/>
+        </p:nvSpPr>
+        <p:spPr>
+          <a:xfrm xmlns:a="http://schemas.openxmlformats.org/drawingml/2006/main">
+            <a:off x="1714500" y="4743450"/>
+            <a:ext cx="9525000" cy="809625"/>
           </a:xfrm>
           <a:prstGeom xmlns:a="http://schemas.openxmlformats.org/drawingml/2006/main" prst="rect">
             <a:avLst/>
@@ -8815,7 +8823,7 @@
           <a:lstStyle xmlns:a="http://schemas.openxmlformats.org/drawingml/2006/main"/>
           <a:p xmlns:a="http://schemas.openxmlformats.org/drawingml/2006/main">
             <a:pPr algn="l">
-              <a:defRPr sz="1500" b="1">
+              <a:defRPr sz="1725" b="1">
                 <a:solidFill>
                   <a:srgbClr val="2F785D"/>
                 </a:solidFill>
@@ -8825,7 +8833,7 @@
               </a:defRPr>
             </a:pPr>
             <a:r>
-              <a:rPr sz="1500" b="1">
+              <a:rPr sz="1725" b="1">
                 <a:solidFill>
                   <a:srgbClr val="2F785D"/>
                 </a:solidFill>
@@ -8833,7 +8841,7 @@
                 <a:ea typeface="Arial"/>
                 <a:cs typeface="Arial"/>
               </a:rPr>
-              <a:t>Check the result: Include squared units for area and check by decomposition.</a:t>
+              <a:t>Total area = 60 + 20 = 80 cm²</a:t>
             </a:r>
           </a:p>
         </p:txBody>
@@ -8841,7 +8849,7 @@
     </p:spTree>
     <p:extLst>
       <p:ext uri="{BB962C8B-B14F-4D97-AF65-F5344CB8AC3E}">
-        <p14:creationId xmlns:p14="http://schemas.microsoft.com/office/powerpoint/2010/main" val="1683378347"/>
+        <p14:creationId xmlns:p14="http://schemas.microsoft.com/office/powerpoint/2010/main" val="359992116"/>
       </p:ext>
     </p:extLst>
   </p:cSld>
@@ -9134,7 +9142,7 @@
           <p:cNvPr id="15" name="">
             <a:extLst xmlns:a="http://schemas.openxmlformats.org/drawingml/2006/main">
               <a:ext uri="{FF2B5EF4-FFF2-40B4-BE49-F238E27FC236}">
-                <a16:creationId xmlns:a16="http://schemas.microsoft.com/office/drawing/2014/main" id="{CD99EFC3-125F-45B1-88A4-2B3F3B6A7F59}"/>
+                <a16:creationId xmlns:a16="http://schemas.microsoft.com/office/drawing/2014/main" id="{C1A63515-98A1-4946-83D0-304176E60D60}"/>
               </a:ext>
             </a:extLst>
           </p:cNvPr>
@@ -9166,7 +9174,7 @@
           <p:cNvPr id="2" name="">
             <a:extLst xmlns:a="http://schemas.openxmlformats.org/drawingml/2006/main">
               <a:ext uri="{FF2B5EF4-FFF2-40B4-BE49-F238E27FC236}">
-                <a16:creationId xmlns:a16="http://schemas.microsoft.com/office/drawing/2014/main" id="{37939FC3-6CFC-447A-97DA-483A702BBAD9}"/>
+                <a16:creationId xmlns:a16="http://schemas.microsoft.com/office/drawing/2014/main" id="{F3FC9FE4-1772-4FA3-8FE8-241976C641D7}"/>
               </a:ext>
             </a:extLst>
           </p:cNvPr>
@@ -9223,7 +9231,7 @@
           <p:cNvPr id="3" name="">
             <a:extLst xmlns:a="http://schemas.openxmlformats.org/drawingml/2006/main">
               <a:ext uri="{FF2B5EF4-FFF2-40B4-BE49-F238E27FC236}">
-                <a16:creationId xmlns:a16="http://schemas.microsoft.com/office/drawing/2014/main" id="{2F667F42-8363-4977-9C96-F5B89043FA98}"/>
+                <a16:creationId xmlns:a16="http://schemas.microsoft.com/office/drawing/2014/main" id="{5E260CF2-7226-4562-ACBD-DACA65D7C2C6}"/>
               </a:ext>
             </a:extLst>
           </p:cNvPr>
@@ -9255,7 +9263,7 @@
           <p:cNvPr id="4" name="">
             <a:extLst xmlns:a="http://schemas.openxmlformats.org/drawingml/2006/main">
               <a:ext uri="{FF2B5EF4-FFF2-40B4-BE49-F238E27FC236}">
-                <a16:creationId xmlns:a16="http://schemas.microsoft.com/office/drawing/2014/main" id="{B93BAF25-222F-45E1-A434-FFB1B4C7BE02}"/>
+                <a16:creationId xmlns:a16="http://schemas.microsoft.com/office/drawing/2014/main" id="{FDA8E4F8-495A-480E-96F3-17131C58594F}"/>
               </a:ext>
             </a:extLst>
           </p:cNvPr>
@@ -9312,7 +9320,7 @@
           <p:cNvPr id="5" name="">
             <a:extLst xmlns:a="http://schemas.openxmlformats.org/drawingml/2006/main">
               <a:ext uri="{FF2B5EF4-FFF2-40B4-BE49-F238E27FC236}">
-                <a16:creationId xmlns:a16="http://schemas.microsoft.com/office/drawing/2014/main" id="{508D7112-7FC0-444E-9E2A-504FC642F3F6}"/>
+                <a16:creationId xmlns:a16="http://schemas.microsoft.com/office/drawing/2014/main" id="{F868A682-327C-44F0-9C74-18A5D57A7B42}"/>
               </a:ext>
             </a:extLst>
           </p:cNvPr>
@@ -9369,7 +9377,7 @@
           <p:cNvPr id="6" name="">
             <a:extLst xmlns:a="http://schemas.openxmlformats.org/drawingml/2006/main">
               <a:ext uri="{FF2B5EF4-FFF2-40B4-BE49-F238E27FC236}">
-                <a16:creationId xmlns:a16="http://schemas.microsoft.com/office/drawing/2014/main" id="{42C9DF1F-EBE8-4C4F-90AF-312C61B84B14}"/>
+                <a16:creationId xmlns:a16="http://schemas.microsoft.com/office/drawing/2014/main" id="{0CCD6FB4-62EB-43F7-96BF-BC9CA61C1DE2}"/>
               </a:ext>
             </a:extLst>
           </p:cNvPr>
@@ -9426,7 +9434,7 @@
           <p:cNvPr id="7" name="">
             <a:extLst xmlns:a="http://schemas.openxmlformats.org/drawingml/2006/main">
               <a:ext uri="{FF2B5EF4-FFF2-40B4-BE49-F238E27FC236}">
-                <a16:creationId xmlns:a16="http://schemas.microsoft.com/office/drawing/2014/main" id="{11A457D0-5B36-49F1-90CC-F06F5215C587}"/>
+                <a16:creationId xmlns:a16="http://schemas.microsoft.com/office/drawing/2014/main" id="{CB27213A-63C5-4C2A-B7FC-36F5DD6D725B}"/>
               </a:ext>
             </a:extLst>
           </p:cNvPr>
@@ -9458,7 +9466,7 @@
           <p:cNvPr id="8" name="">
             <a:extLst xmlns:a="http://schemas.openxmlformats.org/drawingml/2006/main">
               <a:ext uri="{FF2B5EF4-FFF2-40B4-BE49-F238E27FC236}">
-                <a16:creationId xmlns:a16="http://schemas.microsoft.com/office/drawing/2014/main" id="{B6A6F0F2-D92C-4667-9038-27F65AB89DAE}"/>
+                <a16:creationId xmlns:a16="http://schemas.microsoft.com/office/drawing/2014/main" id="{361FBC95-D083-4D85-8219-311D5AAA4B61}"/>
               </a:ext>
             </a:extLst>
           </p:cNvPr>
@@ -9515,7 +9523,7 @@
           <p:cNvPr id="9" name="">
             <a:extLst xmlns:a="http://schemas.openxmlformats.org/drawingml/2006/main">
               <a:ext uri="{FF2B5EF4-FFF2-40B4-BE49-F238E27FC236}">
-                <a16:creationId xmlns:a16="http://schemas.microsoft.com/office/drawing/2014/main" id="{0363D8EC-10DD-4062-8B2E-2F63ABE1C8F8}"/>
+                <a16:creationId xmlns:a16="http://schemas.microsoft.com/office/drawing/2014/main" id="{E3613F19-3FBA-4CB1-9C2B-CC7895464D16}"/>
               </a:ext>
             </a:extLst>
           </p:cNvPr>
@@ -9572,7 +9580,7 @@
           <p:cNvPr id="10" name="">
             <a:extLst xmlns:a="http://schemas.openxmlformats.org/drawingml/2006/main">
               <a:ext uri="{FF2B5EF4-FFF2-40B4-BE49-F238E27FC236}">
-                <a16:creationId xmlns:a16="http://schemas.microsoft.com/office/drawing/2014/main" id="{F9561DAD-C6E5-461D-914C-EFFC7082E550}"/>
+                <a16:creationId xmlns:a16="http://schemas.microsoft.com/office/drawing/2014/main" id="{7CFEEE45-41FF-41E4-9738-415BC2002F0B}"/>
               </a:ext>
             </a:extLst>
           </p:cNvPr>
@@ -9629,7 +9637,7 @@
           <p:cNvPr id="11" name="">
             <a:extLst xmlns:a="http://schemas.openxmlformats.org/drawingml/2006/main">
               <a:ext uri="{FF2B5EF4-FFF2-40B4-BE49-F238E27FC236}">
-                <a16:creationId xmlns:a16="http://schemas.microsoft.com/office/drawing/2014/main" id="{88AC4F48-7354-4E34-A4C2-EAB20A4FDDA2}"/>
+                <a16:creationId xmlns:a16="http://schemas.microsoft.com/office/drawing/2014/main" id="{A4D7C457-7169-4B6A-A419-01572FD1CEA5}"/>
               </a:ext>
             </a:extLst>
           </p:cNvPr>
@@ -9686,7 +9694,7 @@
           <p:cNvPr id="12" name="">
             <a:extLst xmlns:a="http://schemas.openxmlformats.org/drawingml/2006/main">
               <a:ext uri="{FF2B5EF4-FFF2-40B4-BE49-F238E27FC236}">
-                <a16:creationId xmlns:a16="http://schemas.microsoft.com/office/drawing/2014/main" id="{A2935820-FE5B-4F82-9036-80E1065F153F}"/>
+                <a16:creationId xmlns:a16="http://schemas.microsoft.com/office/drawing/2014/main" id="{1CC214A7-DF75-4229-8C70-72D5DC1A853F}"/>
               </a:ext>
             </a:extLst>
           </p:cNvPr>
@@ -9718,7 +9726,7 @@
           <p:cNvPr id="13" name="">
             <a:extLst xmlns:a="http://schemas.openxmlformats.org/drawingml/2006/main">
               <a:ext uri="{FF2B5EF4-FFF2-40B4-BE49-F238E27FC236}">
-                <a16:creationId xmlns:a16="http://schemas.microsoft.com/office/drawing/2014/main" id="{AEA7E8F5-621C-4A8E-876C-B81CEAE029ED}"/>
+                <a16:creationId xmlns:a16="http://schemas.microsoft.com/office/drawing/2014/main" id="{482A1953-FAD6-47F3-BB76-3A094055E5D8}"/>
               </a:ext>
             </a:extLst>
           </p:cNvPr>
@@ -9775,7 +9783,7 @@
           <p:cNvPr id="14" name="">
             <a:extLst xmlns:a="http://schemas.openxmlformats.org/drawingml/2006/main">
               <a:ext uri="{FF2B5EF4-FFF2-40B4-BE49-F238E27FC236}">
-                <a16:creationId xmlns:a16="http://schemas.microsoft.com/office/drawing/2014/main" id="{BF3FBFC2-D9D4-4504-ADBC-EA0A92BA067C}"/>
+                <a16:creationId xmlns:a16="http://schemas.microsoft.com/office/drawing/2014/main" id="{ADE90C03-D901-4A58-BAEA-E0DA8F962FB1}"/>
               </a:ext>
             </a:extLst>
           </p:cNvPr>
@@ -9830,7 +9838,7 @@
     </p:spTree>
     <p:extLst>
       <p:ext uri="{BB962C8B-B14F-4D97-AF65-F5344CB8AC3E}">
-        <p14:creationId xmlns:p14="http://schemas.microsoft.com/office/powerpoint/2010/main" val="93853615"/>
+        <p14:creationId xmlns:p14="http://schemas.microsoft.com/office/powerpoint/2010/main" val="777765624"/>
       </p:ext>
     </p:extLst>
   </p:cSld>
@@ -10031,7 +10039,7 @@
           <p:cNvPr id="16" name="">
             <a:extLst xmlns:a="http://schemas.openxmlformats.org/drawingml/2006/main">
               <a:ext uri="{FF2B5EF4-FFF2-40B4-BE49-F238E27FC236}">
-                <a16:creationId xmlns:a16="http://schemas.microsoft.com/office/drawing/2014/main" id="{A775317A-CB17-4942-9433-F0A7D019AFF6}"/>
+                <a16:creationId xmlns:a16="http://schemas.microsoft.com/office/drawing/2014/main" id="{F5D87E5F-0CB3-4B3E-9FF1-2DB4E9A92827}"/>
               </a:ext>
             </a:extLst>
           </p:cNvPr>
@@ -10063,7 +10071,7 @@
           <p:cNvPr id="2" name="">
             <a:extLst xmlns:a="http://schemas.openxmlformats.org/drawingml/2006/main">
               <a:ext uri="{FF2B5EF4-FFF2-40B4-BE49-F238E27FC236}">
-                <a16:creationId xmlns:a16="http://schemas.microsoft.com/office/drawing/2014/main" id="{FB54B328-E6AE-4241-99E2-175AA083B472}"/>
+                <a16:creationId xmlns:a16="http://schemas.microsoft.com/office/drawing/2014/main" id="{BDAA162B-5128-4199-9EBC-1833B6FAA756}"/>
               </a:ext>
             </a:extLst>
           </p:cNvPr>
@@ -10120,7 +10128,7 @@
           <p:cNvPr id="3" name="">
             <a:extLst xmlns:a="http://schemas.openxmlformats.org/drawingml/2006/main">
               <a:ext uri="{FF2B5EF4-FFF2-40B4-BE49-F238E27FC236}">
-                <a16:creationId xmlns:a16="http://schemas.microsoft.com/office/drawing/2014/main" id="{7310A0DF-7EF1-4017-90FE-2EFDA9EA1FFD}"/>
+                <a16:creationId xmlns:a16="http://schemas.microsoft.com/office/drawing/2014/main" id="{781D3684-F94B-4BB1-BE58-43F6BA59B89D}"/>
               </a:ext>
             </a:extLst>
           </p:cNvPr>
@@ -10152,7 +10160,7 @@
           <p:cNvPr id="4" name="">
             <a:extLst xmlns:a="http://schemas.openxmlformats.org/drawingml/2006/main">
               <a:ext uri="{FF2B5EF4-FFF2-40B4-BE49-F238E27FC236}">
-                <a16:creationId xmlns:a16="http://schemas.microsoft.com/office/drawing/2014/main" id="{728AA9A9-61AD-4456-9E8C-BA2CE4B25BF9}"/>
+                <a16:creationId xmlns:a16="http://schemas.microsoft.com/office/drawing/2014/main" id="{CD30AED0-10B8-4CAD-B7A2-17956EB028C3}"/>
               </a:ext>
             </a:extLst>
           </p:cNvPr>
@@ -10209,7 +10217,7 @@
           <p:cNvPr id="5" name="">
             <a:extLst xmlns:a="http://schemas.openxmlformats.org/drawingml/2006/main">
               <a:ext uri="{FF2B5EF4-FFF2-40B4-BE49-F238E27FC236}">
-                <a16:creationId xmlns:a16="http://schemas.microsoft.com/office/drawing/2014/main" id="{8DC3842D-971E-478F-A296-8356050FEAA8}"/>
+                <a16:creationId xmlns:a16="http://schemas.microsoft.com/office/drawing/2014/main" id="{266E2BE5-36CF-455A-910F-3FF9F72CFFAA}"/>
               </a:ext>
             </a:extLst>
           </p:cNvPr>
@@ -10266,7 +10274,7 @@
           <p:cNvPr id="6" name="">
             <a:extLst xmlns:a="http://schemas.openxmlformats.org/drawingml/2006/main">
               <a:ext uri="{FF2B5EF4-FFF2-40B4-BE49-F238E27FC236}">
-                <a16:creationId xmlns:a16="http://schemas.microsoft.com/office/drawing/2014/main" id="{A4A3449C-8162-45A3-8980-B2BB2811B788}"/>
+                <a16:creationId xmlns:a16="http://schemas.microsoft.com/office/drawing/2014/main" id="{74416422-42CD-4DEE-9098-97BF0EAF5471}"/>
               </a:ext>
             </a:extLst>
           </p:cNvPr>
@@ -10323,7 +10331,7 @@
           <p:cNvPr id="7" name="">
             <a:extLst xmlns:a="http://schemas.openxmlformats.org/drawingml/2006/main">
               <a:ext uri="{FF2B5EF4-FFF2-40B4-BE49-F238E27FC236}">
-                <a16:creationId xmlns:a16="http://schemas.microsoft.com/office/drawing/2014/main" id="{486F18F1-B7C2-45E4-B9E3-B50B6FBA8EC5}"/>
+                <a16:creationId xmlns:a16="http://schemas.microsoft.com/office/drawing/2014/main" id="{67FED3DF-3A29-4151-AFDE-734DC2868E03}"/>
               </a:ext>
             </a:extLst>
           </p:cNvPr>
@@ -10355,7 +10363,7 @@
           <p:cNvPr id="8" name="">
             <a:extLst xmlns:a="http://schemas.openxmlformats.org/drawingml/2006/main">
               <a:ext uri="{FF2B5EF4-FFF2-40B4-BE49-F238E27FC236}">
-                <a16:creationId xmlns:a16="http://schemas.microsoft.com/office/drawing/2014/main" id="{BF774894-C629-4838-948D-3FF318634085}"/>
+                <a16:creationId xmlns:a16="http://schemas.microsoft.com/office/drawing/2014/main" id="{01201C07-7D43-401C-A294-85589ABFC672}"/>
               </a:ext>
             </a:extLst>
           </p:cNvPr>
@@ -10412,7 +10420,7 @@
           <p:cNvPr id="9" name="">
             <a:extLst xmlns:a="http://schemas.openxmlformats.org/drawingml/2006/main">
               <a:ext uri="{FF2B5EF4-FFF2-40B4-BE49-F238E27FC236}">
-                <a16:creationId xmlns:a16="http://schemas.microsoft.com/office/drawing/2014/main" id="{95A31545-5BB1-4CBD-8C6E-054A609C9AC8}"/>
+                <a16:creationId xmlns:a16="http://schemas.microsoft.com/office/drawing/2014/main" id="{EB6E54EF-6090-42B8-A300-EE328E1571F8}"/>
               </a:ext>
             </a:extLst>
           </p:cNvPr>
@@ -10469,7 +10477,7 @@
           <p:cNvPr id="10" name="">
             <a:extLst xmlns:a="http://schemas.openxmlformats.org/drawingml/2006/main">
               <a:ext uri="{FF2B5EF4-FFF2-40B4-BE49-F238E27FC236}">
-                <a16:creationId xmlns:a16="http://schemas.microsoft.com/office/drawing/2014/main" id="{7FB0EB5A-4043-4490-9000-FC87AEF8324F}"/>
+                <a16:creationId xmlns:a16="http://schemas.microsoft.com/office/drawing/2014/main" id="{7C13E2DD-8658-46CD-8921-5F726D52544E}"/>
               </a:ext>
             </a:extLst>
           </p:cNvPr>
@@ -10526,7 +10534,7 @@
           <p:cNvPr id="11" name="">
             <a:extLst xmlns:a="http://schemas.openxmlformats.org/drawingml/2006/main">
               <a:ext uri="{FF2B5EF4-FFF2-40B4-BE49-F238E27FC236}">
-                <a16:creationId xmlns:a16="http://schemas.microsoft.com/office/drawing/2014/main" id="{543F719C-22C5-4FB2-B247-1A22DEF1EE56}"/>
+                <a16:creationId xmlns:a16="http://schemas.microsoft.com/office/drawing/2014/main" id="{AE54CD90-A1E4-42C0-A9AC-576860A2E346}"/>
               </a:ext>
             </a:extLst>
           </p:cNvPr>
@@ -10583,7 +10591,7 @@
           <p:cNvPr id="12" name="">
             <a:extLst xmlns:a="http://schemas.openxmlformats.org/drawingml/2006/main">
               <a:ext uri="{FF2B5EF4-FFF2-40B4-BE49-F238E27FC236}">
-                <a16:creationId xmlns:a16="http://schemas.microsoft.com/office/drawing/2014/main" id="{94704839-3592-4D44-AB2F-4AE35F172CF4}"/>
+                <a16:creationId xmlns:a16="http://schemas.microsoft.com/office/drawing/2014/main" id="{9B4228CF-45E7-4DCF-93D0-9A3EF287895C}"/>
               </a:ext>
             </a:extLst>
           </p:cNvPr>
@@ -10640,7 +10648,7 @@
           <p:cNvPr id="13" name="">
             <a:extLst xmlns:a="http://schemas.openxmlformats.org/drawingml/2006/main">
               <a:ext uri="{FF2B5EF4-FFF2-40B4-BE49-F238E27FC236}">
-                <a16:creationId xmlns:a16="http://schemas.microsoft.com/office/drawing/2014/main" id="{74A48A5C-B758-4092-9A3D-4D05C99D58B6}"/>
+                <a16:creationId xmlns:a16="http://schemas.microsoft.com/office/drawing/2014/main" id="{118A4F40-5E7F-48B4-9D67-4D472B7436B2}"/>
               </a:ext>
             </a:extLst>
           </p:cNvPr>
@@ -10697,7 +10705,7 @@
           <p:cNvPr id="14" name="">
             <a:extLst xmlns:a="http://schemas.openxmlformats.org/drawingml/2006/main">
               <a:ext uri="{FF2B5EF4-FFF2-40B4-BE49-F238E27FC236}">
-                <a16:creationId xmlns:a16="http://schemas.microsoft.com/office/drawing/2014/main" id="{A866076B-1E4E-4FDC-AE50-8A2233C6A518}"/>
+                <a16:creationId xmlns:a16="http://schemas.microsoft.com/office/drawing/2014/main" id="{609DC498-3D4F-4877-A487-FB978BF8D239}"/>
               </a:ext>
             </a:extLst>
           </p:cNvPr>
@@ -10754,7 +10762,7 @@
           <p:cNvPr id="15" name="">
             <a:extLst xmlns:a="http://schemas.openxmlformats.org/drawingml/2006/main">
               <a:ext uri="{FF2B5EF4-FFF2-40B4-BE49-F238E27FC236}">
-                <a16:creationId xmlns:a16="http://schemas.microsoft.com/office/drawing/2014/main" id="{3AB98ADC-21F0-4CA7-A364-140CCF545F6B}"/>
+                <a16:creationId xmlns:a16="http://schemas.microsoft.com/office/drawing/2014/main" id="{48F0CC61-7274-486E-BA64-D50E1C6EB756}"/>
               </a:ext>
             </a:extLst>
           </p:cNvPr>
@@ -10809,7 +10817,7 @@
     </p:spTree>
     <p:extLst>
       <p:ext uri="{BB962C8B-B14F-4D97-AF65-F5344CB8AC3E}">
-        <p14:creationId xmlns:p14="http://schemas.microsoft.com/office/powerpoint/2010/main" val="1768156432"/>
+        <p14:creationId xmlns:p14="http://schemas.microsoft.com/office/powerpoint/2010/main" val="305408850"/>
       </p:ext>
     </p:extLst>
   </p:cSld>
@@ -10964,7 +10972,7 @@
           <p:cNvPr id="16" name="">
             <a:extLst xmlns:a="http://schemas.openxmlformats.org/drawingml/2006/main">
               <a:ext uri="{FF2B5EF4-FFF2-40B4-BE49-F238E27FC236}">
-                <a16:creationId xmlns:a16="http://schemas.microsoft.com/office/drawing/2014/main" id="{581CEAC7-2F6A-45D8-B37F-3284BD5B11B9}"/>
+                <a16:creationId xmlns:a16="http://schemas.microsoft.com/office/drawing/2014/main" id="{0147521D-1983-4AA5-A9E6-F15C378D630F}"/>
               </a:ext>
             </a:extLst>
           </p:cNvPr>
@@ -10996,7 +11004,7 @@
           <p:cNvPr id="2" name="">
             <a:extLst xmlns:a="http://schemas.openxmlformats.org/drawingml/2006/main">
               <a:ext uri="{FF2B5EF4-FFF2-40B4-BE49-F238E27FC236}">
-                <a16:creationId xmlns:a16="http://schemas.microsoft.com/office/drawing/2014/main" id="{669D94E2-17AF-4D3A-A457-9BFB6A643481}"/>
+                <a16:creationId xmlns:a16="http://schemas.microsoft.com/office/drawing/2014/main" id="{341E4D83-3DAA-41B9-9C47-1EBCF41AC9B6}"/>
               </a:ext>
             </a:extLst>
           </p:cNvPr>
@@ -11053,7 +11061,7 @@
           <p:cNvPr id="3" name="">
             <a:extLst xmlns:a="http://schemas.openxmlformats.org/drawingml/2006/main">
               <a:ext uri="{FF2B5EF4-FFF2-40B4-BE49-F238E27FC236}">
-                <a16:creationId xmlns:a16="http://schemas.microsoft.com/office/drawing/2014/main" id="{B5344BE2-176E-4240-9E8C-1DBE93908CDE}"/>
+                <a16:creationId xmlns:a16="http://schemas.microsoft.com/office/drawing/2014/main" id="{7053D0EA-6461-4F2B-A3B2-65AC703CB42D}"/>
               </a:ext>
             </a:extLst>
           </p:cNvPr>
@@ -11085,7 +11093,7 @@
           <p:cNvPr id="4" name="">
             <a:extLst xmlns:a="http://schemas.openxmlformats.org/drawingml/2006/main">
               <a:ext uri="{FF2B5EF4-FFF2-40B4-BE49-F238E27FC236}">
-                <a16:creationId xmlns:a16="http://schemas.microsoft.com/office/drawing/2014/main" id="{05CD29BB-14B2-43B7-86A5-88D54A8B59DD}"/>
+                <a16:creationId xmlns:a16="http://schemas.microsoft.com/office/drawing/2014/main" id="{07702074-1103-4B51-A8FC-60BD7ACC0643}"/>
               </a:ext>
             </a:extLst>
           </p:cNvPr>
@@ -11142,7 +11150,7 @@
           <p:cNvPr id="5" name="">
             <a:extLst xmlns:a="http://schemas.openxmlformats.org/drawingml/2006/main">
               <a:ext uri="{FF2B5EF4-FFF2-40B4-BE49-F238E27FC236}">
-                <a16:creationId xmlns:a16="http://schemas.microsoft.com/office/drawing/2014/main" id="{58BD2AEB-4625-4F65-B653-66331DD0346D}"/>
+                <a16:creationId xmlns:a16="http://schemas.microsoft.com/office/drawing/2014/main" id="{2F466503-578F-42E3-A42D-A11EB59EB1E2}"/>
               </a:ext>
             </a:extLst>
           </p:cNvPr>
@@ -11199,7 +11207,7 @@
           <p:cNvPr id="6" name="">
             <a:extLst xmlns:a="http://schemas.openxmlformats.org/drawingml/2006/main">
               <a:ext uri="{FF2B5EF4-FFF2-40B4-BE49-F238E27FC236}">
-                <a16:creationId xmlns:a16="http://schemas.microsoft.com/office/drawing/2014/main" id="{46CF19F3-53AE-4C49-B174-6C20FA06E1B0}"/>
+                <a16:creationId xmlns:a16="http://schemas.microsoft.com/office/drawing/2014/main" id="{6E6A5D72-CE89-4395-9DE0-A277B82A8104}"/>
               </a:ext>
             </a:extLst>
           </p:cNvPr>
@@ -11256,7 +11264,7 @@
           <p:cNvPr id="7" name="">
             <a:extLst xmlns:a="http://schemas.openxmlformats.org/drawingml/2006/main">
               <a:ext uri="{FF2B5EF4-FFF2-40B4-BE49-F238E27FC236}">
-                <a16:creationId xmlns:a16="http://schemas.microsoft.com/office/drawing/2014/main" id="{83259D02-ACDD-43BF-807B-8C0F91AB5D7D}"/>
+                <a16:creationId xmlns:a16="http://schemas.microsoft.com/office/drawing/2014/main" id="{A51501F3-021B-43D6-9644-2DF86E961623}"/>
               </a:ext>
             </a:extLst>
           </p:cNvPr>
@@ -11288,7 +11296,7 @@
           <p:cNvPr id="8" name="">
             <a:extLst xmlns:a="http://schemas.openxmlformats.org/drawingml/2006/main">
               <a:ext uri="{FF2B5EF4-FFF2-40B4-BE49-F238E27FC236}">
-                <a16:creationId xmlns:a16="http://schemas.microsoft.com/office/drawing/2014/main" id="{317F4787-56B1-494B-B033-735232466278}"/>
+                <a16:creationId xmlns:a16="http://schemas.microsoft.com/office/drawing/2014/main" id="{489895E5-A3F1-4833-8F9F-B41EEFC5C598}"/>
               </a:ext>
             </a:extLst>
           </p:cNvPr>
@@ -11345,7 +11353,7 @@
           <p:cNvPr id="9" name="">
             <a:extLst xmlns:a="http://schemas.openxmlformats.org/drawingml/2006/main">
               <a:ext uri="{FF2B5EF4-FFF2-40B4-BE49-F238E27FC236}">
-                <a16:creationId xmlns:a16="http://schemas.microsoft.com/office/drawing/2014/main" id="{10BE74D9-B3C5-4A7A-B0A3-A10708D0E8C1}"/>
+                <a16:creationId xmlns:a16="http://schemas.microsoft.com/office/drawing/2014/main" id="{326A2274-BDD9-414D-8867-D4CDB96DBBD1}"/>
               </a:ext>
             </a:extLst>
           </p:cNvPr>
@@ -11406,7 +11414,7 @@
           <p:nvPr/>
         </p:nvPicPr>
         <p:blipFill>
-          <a:blip xmlns:r="http://schemas.openxmlformats.org/officeDocument/2006/relationships" xmlns:a="http://schemas.openxmlformats.org/drawingml/2006/main" r:embed="R4acad85632b8423c"/>
+          <a:blip xmlns:r="http://schemas.openxmlformats.org/officeDocument/2006/relationships" xmlns:a="http://schemas.openxmlformats.org/drawingml/2006/main" r:embed="R41df7514bba14b8e"/>
           <a:stretch xmlns:a="http://schemas.openxmlformats.org/drawingml/2006/main"/>
         </p:blipFill>
         <p:spPr>
@@ -11424,7 +11432,7 @@
           <p:cNvPr id="11" name="">
             <a:extLst xmlns:a="http://schemas.openxmlformats.org/drawingml/2006/main">
               <a:ext uri="{FF2B5EF4-FFF2-40B4-BE49-F238E27FC236}">
-                <a16:creationId xmlns:a16="http://schemas.microsoft.com/office/drawing/2014/main" id="{CE4FA58A-B23C-4F42-954E-6C52FD18077A}"/>
+                <a16:creationId xmlns:a16="http://schemas.microsoft.com/office/drawing/2014/main" id="{4CC4E2FF-73FA-4AD5-B583-2E8CFE46F4A7}"/>
               </a:ext>
             </a:extLst>
           </p:cNvPr>
@@ -11481,7 +11489,7 @@
           <p:cNvPr id="12" name="">
             <a:extLst xmlns:a="http://schemas.openxmlformats.org/drawingml/2006/main">
               <a:ext uri="{FF2B5EF4-FFF2-40B4-BE49-F238E27FC236}">
-                <a16:creationId xmlns:a16="http://schemas.microsoft.com/office/drawing/2014/main" id="{503DBD07-B062-44BF-8970-3E880F8700DF}"/>
+                <a16:creationId xmlns:a16="http://schemas.microsoft.com/office/drawing/2014/main" id="{4AC4D1EB-02CB-4FC5-A0D3-238E08CBC866}"/>
               </a:ext>
             </a:extLst>
           </p:cNvPr>
@@ -11538,7 +11546,7 @@
           <p:cNvPr id="13" name="">
             <a:extLst xmlns:a="http://schemas.openxmlformats.org/drawingml/2006/main">
               <a:ext uri="{FF2B5EF4-FFF2-40B4-BE49-F238E27FC236}">
-                <a16:creationId xmlns:a16="http://schemas.microsoft.com/office/drawing/2014/main" id="{B891529D-60C5-4379-B909-BE25FDA89AED}"/>
+                <a16:creationId xmlns:a16="http://schemas.microsoft.com/office/drawing/2014/main" id="{AF9EA2E7-3FA7-406A-B94E-D853869CFE3A}"/>
               </a:ext>
             </a:extLst>
           </p:cNvPr>
@@ -11570,7 +11578,7 @@
           <p:cNvPr id="14" name="">
             <a:extLst xmlns:a="http://schemas.openxmlformats.org/drawingml/2006/main">
               <a:ext uri="{FF2B5EF4-FFF2-40B4-BE49-F238E27FC236}">
-                <a16:creationId xmlns:a16="http://schemas.microsoft.com/office/drawing/2014/main" id="{727D7D81-9609-47FF-A167-5777677BF6B4}"/>
+                <a16:creationId xmlns:a16="http://schemas.microsoft.com/office/drawing/2014/main" id="{863DF6F3-842E-46C0-A70D-C9A58864FC8D}"/>
               </a:ext>
             </a:extLst>
           </p:cNvPr>
@@ -11627,7 +11635,7 @@
           <p:cNvPr id="15" name="">
             <a:extLst xmlns:a="http://schemas.openxmlformats.org/drawingml/2006/main">
               <a:ext uri="{FF2B5EF4-FFF2-40B4-BE49-F238E27FC236}">
-                <a16:creationId xmlns:a16="http://schemas.microsoft.com/office/drawing/2014/main" id="{50FD9D91-83C1-4EC5-8EEA-0A093ED1F549}"/>
+                <a16:creationId xmlns:a16="http://schemas.microsoft.com/office/drawing/2014/main" id="{17E881D3-8FAC-4A60-A2C4-EF28C1302975}"/>
               </a:ext>
             </a:extLst>
           </p:cNvPr>
@@ -11682,7 +11690,7 @@
     </p:spTree>
     <p:extLst>
       <p:ext uri="{BB962C8B-B14F-4D97-AF65-F5344CB8AC3E}">
-        <p14:creationId xmlns:p14="http://schemas.microsoft.com/office/powerpoint/2010/main" val="1742745365"/>
+        <p14:creationId xmlns:p14="http://schemas.microsoft.com/office/powerpoint/2010/main" val="1567219393"/>
       </p:ext>
     </p:extLst>
   </p:cSld>
@@ -11837,7 +11845,7 @@
           <p:cNvPr id="23" name="">
             <a:extLst xmlns:a="http://schemas.openxmlformats.org/drawingml/2006/main">
               <a:ext uri="{FF2B5EF4-FFF2-40B4-BE49-F238E27FC236}">
-                <a16:creationId xmlns:a16="http://schemas.microsoft.com/office/drawing/2014/main" id="{4B3C7402-DF97-42FC-BE45-C77C33D27E81}"/>
+                <a16:creationId xmlns:a16="http://schemas.microsoft.com/office/drawing/2014/main" id="{D7982F2A-D4AB-4CAB-BB3B-208364CD7AE4}"/>
               </a:ext>
             </a:extLst>
           </p:cNvPr>
@@ -11869,7 +11877,7 @@
           <p:cNvPr id="2" name="">
             <a:extLst xmlns:a="http://schemas.openxmlformats.org/drawingml/2006/main">
               <a:ext uri="{FF2B5EF4-FFF2-40B4-BE49-F238E27FC236}">
-                <a16:creationId xmlns:a16="http://schemas.microsoft.com/office/drawing/2014/main" id="{110D31E8-80F4-4648-9F65-FD7834FEAE3F}"/>
+                <a16:creationId xmlns:a16="http://schemas.microsoft.com/office/drawing/2014/main" id="{CDA6588C-48FF-4F53-ADBC-9B61F3A4F7D9}"/>
               </a:ext>
             </a:extLst>
           </p:cNvPr>
@@ -11926,7 +11934,7 @@
           <p:cNvPr id="3" name="">
             <a:extLst xmlns:a="http://schemas.openxmlformats.org/drawingml/2006/main">
               <a:ext uri="{FF2B5EF4-FFF2-40B4-BE49-F238E27FC236}">
-                <a16:creationId xmlns:a16="http://schemas.microsoft.com/office/drawing/2014/main" id="{797D770C-A96D-47D4-BAB9-05635A9EF227}"/>
+                <a16:creationId xmlns:a16="http://schemas.microsoft.com/office/drawing/2014/main" id="{68566070-DBA5-422D-A264-7399AA0ED582}"/>
               </a:ext>
             </a:extLst>
           </p:cNvPr>
@@ -11958,7 +11966,7 @@
           <p:cNvPr id="4" name="">
             <a:extLst xmlns:a="http://schemas.openxmlformats.org/drawingml/2006/main">
               <a:ext uri="{FF2B5EF4-FFF2-40B4-BE49-F238E27FC236}">
-                <a16:creationId xmlns:a16="http://schemas.microsoft.com/office/drawing/2014/main" id="{61BB7C04-C672-4BC9-B2DF-A45127902672}"/>
+                <a16:creationId xmlns:a16="http://schemas.microsoft.com/office/drawing/2014/main" id="{9DD789E9-D9B1-4327-A352-C3E3BE6921E7}"/>
               </a:ext>
             </a:extLst>
           </p:cNvPr>
@@ -12015,7 +12023,7 @@
           <p:cNvPr id="5" name="">
             <a:extLst xmlns:a="http://schemas.openxmlformats.org/drawingml/2006/main">
               <a:ext uri="{FF2B5EF4-FFF2-40B4-BE49-F238E27FC236}">
-                <a16:creationId xmlns:a16="http://schemas.microsoft.com/office/drawing/2014/main" id="{FE378728-947E-4F32-B156-EA8382D6FBCA}"/>
+                <a16:creationId xmlns:a16="http://schemas.microsoft.com/office/drawing/2014/main" id="{4BCE78A5-5505-4132-92D4-FA6BA8BA1AB2}"/>
               </a:ext>
             </a:extLst>
           </p:cNvPr>
@@ -12072,7 +12080,7 @@
           <p:cNvPr id="6" name="">
             <a:extLst xmlns:a="http://schemas.openxmlformats.org/drawingml/2006/main">
               <a:ext uri="{FF2B5EF4-FFF2-40B4-BE49-F238E27FC236}">
-                <a16:creationId xmlns:a16="http://schemas.microsoft.com/office/drawing/2014/main" id="{7B227813-11E6-4498-9A05-9B9FF5A3FCF7}"/>
+                <a16:creationId xmlns:a16="http://schemas.microsoft.com/office/drawing/2014/main" id="{AFDB532B-9086-433D-A4BE-7BF96C3590AC}"/>
               </a:ext>
             </a:extLst>
           </p:cNvPr>
@@ -12129,7 +12137,7 @@
           <p:cNvPr id="7" name="">
             <a:extLst xmlns:a="http://schemas.openxmlformats.org/drawingml/2006/main">
               <a:ext uri="{FF2B5EF4-FFF2-40B4-BE49-F238E27FC236}">
-                <a16:creationId xmlns:a16="http://schemas.microsoft.com/office/drawing/2014/main" id="{DFC4D761-8CAE-4FC4-AE84-ADBC1D5CB30E}"/>
+                <a16:creationId xmlns:a16="http://schemas.microsoft.com/office/drawing/2014/main" id="{98DB793E-2A80-47F4-90BF-5C45D6021B31}"/>
               </a:ext>
             </a:extLst>
           </p:cNvPr>
@@ -12161,7 +12169,7 @@
           <p:cNvPr id="8" name="">
             <a:extLst xmlns:a="http://schemas.openxmlformats.org/drawingml/2006/main">
               <a:ext uri="{FF2B5EF4-FFF2-40B4-BE49-F238E27FC236}">
-                <a16:creationId xmlns:a16="http://schemas.microsoft.com/office/drawing/2014/main" id="{A26875E5-B4DB-4B19-AD3E-179A925BA400}"/>
+                <a16:creationId xmlns:a16="http://schemas.microsoft.com/office/drawing/2014/main" id="{A7C04F2B-8489-46B2-B4A0-6DC72874B1A5}"/>
               </a:ext>
             </a:extLst>
           </p:cNvPr>
@@ -12218,7 +12226,7 @@
           <p:cNvPr id="9" name="">
             <a:extLst xmlns:a="http://schemas.openxmlformats.org/drawingml/2006/main">
               <a:ext uri="{FF2B5EF4-FFF2-40B4-BE49-F238E27FC236}">
-                <a16:creationId xmlns:a16="http://schemas.microsoft.com/office/drawing/2014/main" id="{F781656E-7511-4A29-B451-5F3FD5FE1F67}"/>
+                <a16:creationId xmlns:a16="http://schemas.microsoft.com/office/drawing/2014/main" id="{404CDB0D-CFDC-4629-A3A4-0A7DC11D3D00}"/>
               </a:ext>
             </a:extLst>
           </p:cNvPr>
@@ -12275,7 +12283,7 @@
           <p:cNvPr id="10" name="">
             <a:extLst xmlns:a="http://schemas.openxmlformats.org/drawingml/2006/main">
               <a:ext uri="{FF2B5EF4-FFF2-40B4-BE49-F238E27FC236}">
-                <a16:creationId xmlns:a16="http://schemas.microsoft.com/office/drawing/2014/main" id="{151E266A-7CC0-429B-86B1-FB13D7028FDA}"/>
+                <a16:creationId xmlns:a16="http://schemas.microsoft.com/office/drawing/2014/main" id="{F34FA44A-E991-481B-B5FD-C11375A3E7FB}"/>
               </a:ext>
             </a:extLst>
           </p:cNvPr>
@@ -12309,7 +12317,7 @@
           <p:cNvPr id="11" name="">
             <a:extLst xmlns:a="http://schemas.openxmlformats.org/drawingml/2006/main">
               <a:ext uri="{FF2B5EF4-FFF2-40B4-BE49-F238E27FC236}">
-                <a16:creationId xmlns:a16="http://schemas.microsoft.com/office/drawing/2014/main" id="{A96C69A6-676A-4B85-B3A0-D15E608FE56E}"/>
+                <a16:creationId xmlns:a16="http://schemas.microsoft.com/office/drawing/2014/main" id="{9B0BF207-712C-4F5B-A5AE-DCF504BB90F4}"/>
               </a:ext>
             </a:extLst>
           </p:cNvPr>
@@ -12341,7 +12349,7 @@
           <p:cNvPr id="12" name="">
             <a:extLst xmlns:a="http://schemas.openxmlformats.org/drawingml/2006/main">
               <a:ext uri="{FF2B5EF4-FFF2-40B4-BE49-F238E27FC236}">
-                <a16:creationId xmlns:a16="http://schemas.microsoft.com/office/drawing/2014/main" id="{DA3F846F-46B6-4977-B723-46EAE155908B}"/>
+                <a16:creationId xmlns:a16="http://schemas.microsoft.com/office/drawing/2014/main" id="{B523D3FD-BED5-4D5C-A47C-F95E194B0FCF}"/>
               </a:ext>
             </a:extLst>
           </p:cNvPr>
@@ -12398,7 +12406,7 @@
           <p:cNvPr id="13" name="">
             <a:extLst xmlns:a="http://schemas.openxmlformats.org/drawingml/2006/main">
               <a:ext uri="{FF2B5EF4-FFF2-40B4-BE49-F238E27FC236}">
-                <a16:creationId xmlns:a16="http://schemas.microsoft.com/office/drawing/2014/main" id="{121DFF10-22F5-4738-90A2-BD1B2835355C}"/>
+                <a16:creationId xmlns:a16="http://schemas.microsoft.com/office/drawing/2014/main" id="{380A31A2-1BE2-452D-9934-DAD4E4AD76C3}"/>
               </a:ext>
             </a:extLst>
           </p:cNvPr>
@@ -12455,7 +12463,7 @@
           <p:cNvPr id="14" name="">
             <a:extLst xmlns:a="http://schemas.openxmlformats.org/drawingml/2006/main">
               <a:ext uri="{FF2B5EF4-FFF2-40B4-BE49-F238E27FC236}">
-                <a16:creationId xmlns:a16="http://schemas.microsoft.com/office/drawing/2014/main" id="{512B0523-501E-466D-96DA-F2DBEE1ED779}"/>
+                <a16:creationId xmlns:a16="http://schemas.microsoft.com/office/drawing/2014/main" id="{14DD1C8D-05E5-4222-9762-E7634CB9A79E}"/>
               </a:ext>
             </a:extLst>
           </p:cNvPr>
@@ -12489,7 +12497,7 @@
           <p:cNvPr id="15" name="">
             <a:extLst xmlns:a="http://schemas.openxmlformats.org/drawingml/2006/main">
               <a:ext uri="{FF2B5EF4-FFF2-40B4-BE49-F238E27FC236}">
-                <a16:creationId xmlns:a16="http://schemas.microsoft.com/office/drawing/2014/main" id="{CA49EF41-4D2F-4A32-9F1C-9BCBBDBB8F11}"/>
+                <a16:creationId xmlns:a16="http://schemas.microsoft.com/office/drawing/2014/main" id="{4B616AA1-882A-4060-B8E8-EC308ECEA51E}"/>
               </a:ext>
             </a:extLst>
           </p:cNvPr>
@@ -12521,7 +12529,7 @@
           <p:cNvPr id="16" name="">
             <a:extLst xmlns:a="http://schemas.openxmlformats.org/drawingml/2006/main">
               <a:ext uri="{FF2B5EF4-FFF2-40B4-BE49-F238E27FC236}">
-                <a16:creationId xmlns:a16="http://schemas.microsoft.com/office/drawing/2014/main" id="{F59B82F3-61FE-4A93-9DC8-17721255CD00}"/>
+                <a16:creationId xmlns:a16="http://schemas.microsoft.com/office/drawing/2014/main" id="{60C8E151-DF67-406A-AAA8-AEB6B604B708}"/>
               </a:ext>
             </a:extLst>
           </p:cNvPr>
@@ -12578,7 +12586,7 @@
           <p:cNvPr id="17" name="">
             <a:extLst xmlns:a="http://schemas.openxmlformats.org/drawingml/2006/main">
               <a:ext uri="{FF2B5EF4-FFF2-40B4-BE49-F238E27FC236}">
-                <a16:creationId xmlns:a16="http://schemas.microsoft.com/office/drawing/2014/main" id="{6A545580-1381-4143-B1EC-5DC60626B859}"/>
+                <a16:creationId xmlns:a16="http://schemas.microsoft.com/office/drawing/2014/main" id="{B36D53B0-C526-4EE0-9ACD-B228DA62B357}"/>
               </a:ext>
             </a:extLst>
           </p:cNvPr>
@@ -12635,7 +12643,7 @@
           <p:cNvPr id="18" name="">
             <a:extLst xmlns:a="http://schemas.openxmlformats.org/drawingml/2006/main">
               <a:ext uri="{FF2B5EF4-FFF2-40B4-BE49-F238E27FC236}">
-                <a16:creationId xmlns:a16="http://schemas.microsoft.com/office/drawing/2014/main" id="{C67A456C-B160-4996-8C6A-AD5A2A29282E}"/>
+                <a16:creationId xmlns:a16="http://schemas.microsoft.com/office/drawing/2014/main" id="{05EA151E-8C8A-469F-8C73-8BA9EF7378E1}"/>
               </a:ext>
             </a:extLst>
           </p:cNvPr>
@@ -12669,7 +12677,7 @@
           <p:cNvPr id="19" name="">
             <a:extLst xmlns:a="http://schemas.openxmlformats.org/drawingml/2006/main">
               <a:ext uri="{FF2B5EF4-FFF2-40B4-BE49-F238E27FC236}">
-                <a16:creationId xmlns:a16="http://schemas.microsoft.com/office/drawing/2014/main" id="{42F17CAE-5226-4AC0-A6A1-6B6FC9B076C5}"/>
+                <a16:creationId xmlns:a16="http://schemas.microsoft.com/office/drawing/2014/main" id="{F1CC378F-B93F-4F4D-8A95-2F0D6C612428}"/>
               </a:ext>
             </a:extLst>
           </p:cNvPr>
@@ -12701,7 +12709,7 @@
           <p:cNvPr id="20" name="">
             <a:extLst xmlns:a="http://schemas.openxmlformats.org/drawingml/2006/main">
               <a:ext uri="{FF2B5EF4-FFF2-40B4-BE49-F238E27FC236}">
-                <a16:creationId xmlns:a16="http://schemas.microsoft.com/office/drawing/2014/main" id="{14CB00F4-763E-47F6-A20E-8653CA479EAF}"/>
+                <a16:creationId xmlns:a16="http://schemas.microsoft.com/office/drawing/2014/main" id="{97707793-F17A-4956-890B-AC28E32F7BD9}"/>
               </a:ext>
             </a:extLst>
           </p:cNvPr>
@@ -12758,7 +12766,7 @@
           <p:cNvPr id="21" name="">
             <a:extLst xmlns:a="http://schemas.openxmlformats.org/drawingml/2006/main">
               <a:ext uri="{FF2B5EF4-FFF2-40B4-BE49-F238E27FC236}">
-                <a16:creationId xmlns:a16="http://schemas.microsoft.com/office/drawing/2014/main" id="{55C98374-8900-4167-8DDA-848EA41AC6D5}"/>
+                <a16:creationId xmlns:a16="http://schemas.microsoft.com/office/drawing/2014/main" id="{888965F0-2DEB-49FA-9F95-C40C06D9E8DF}"/>
               </a:ext>
             </a:extLst>
           </p:cNvPr>
@@ -12815,7 +12823,7 @@
           <p:cNvPr id="22" name="">
             <a:extLst xmlns:a="http://schemas.openxmlformats.org/drawingml/2006/main">
               <a:ext uri="{FF2B5EF4-FFF2-40B4-BE49-F238E27FC236}">
-                <a16:creationId xmlns:a16="http://schemas.microsoft.com/office/drawing/2014/main" id="{FFC9B6EB-D209-48CB-AC5F-3D7542AB95CE}"/>
+                <a16:creationId xmlns:a16="http://schemas.microsoft.com/office/drawing/2014/main" id="{BA523B9E-4570-4AEF-9127-1D9F9DDAC711}"/>
               </a:ext>
             </a:extLst>
           </p:cNvPr>
@@ -12870,7 +12878,7 @@
     </p:spTree>
     <p:extLst>
       <p:ext uri="{BB962C8B-B14F-4D97-AF65-F5344CB8AC3E}">
-        <p14:creationId xmlns:p14="http://schemas.microsoft.com/office/powerpoint/2010/main" val="591613531"/>
+        <p14:creationId xmlns:p14="http://schemas.microsoft.com/office/powerpoint/2010/main" val="709686729"/>
       </p:ext>
     </p:extLst>
   </p:cSld>
@@ -13071,7 +13079,7 @@
           <p:cNvPr id="22" name="">
             <a:extLst xmlns:a="http://schemas.openxmlformats.org/drawingml/2006/main">
               <a:ext uri="{FF2B5EF4-FFF2-40B4-BE49-F238E27FC236}">
-                <a16:creationId xmlns:a16="http://schemas.microsoft.com/office/drawing/2014/main" id="{93B0C6D8-78E6-4084-9A65-81265A2D826D}"/>
+                <a16:creationId xmlns:a16="http://schemas.microsoft.com/office/drawing/2014/main" id="{275200D1-516D-4DFD-A498-5C6E02ED191C}"/>
               </a:ext>
             </a:extLst>
           </p:cNvPr>
@@ -13103,7 +13111,7 @@
           <p:cNvPr id="2" name="">
             <a:extLst xmlns:a="http://schemas.openxmlformats.org/drawingml/2006/main">
               <a:ext uri="{FF2B5EF4-FFF2-40B4-BE49-F238E27FC236}">
-                <a16:creationId xmlns:a16="http://schemas.microsoft.com/office/drawing/2014/main" id="{50719224-BE7E-4814-8CAA-2823032557F2}"/>
+                <a16:creationId xmlns:a16="http://schemas.microsoft.com/office/drawing/2014/main" id="{DE6CF9F6-74BE-4D48-8357-4B48F59D75C8}"/>
               </a:ext>
             </a:extLst>
           </p:cNvPr>
@@ -13160,7 +13168,7 @@
           <p:cNvPr id="3" name="">
             <a:extLst xmlns:a="http://schemas.openxmlformats.org/drawingml/2006/main">
               <a:ext uri="{FF2B5EF4-FFF2-40B4-BE49-F238E27FC236}">
-                <a16:creationId xmlns:a16="http://schemas.microsoft.com/office/drawing/2014/main" id="{B54DFE08-43A3-4004-814E-078ECB8E1DBC}"/>
+                <a16:creationId xmlns:a16="http://schemas.microsoft.com/office/drawing/2014/main" id="{1C41CE0A-97E5-4918-ABE3-0323A36ACD57}"/>
               </a:ext>
             </a:extLst>
           </p:cNvPr>
@@ -13192,7 +13200,7 @@
           <p:cNvPr id="4" name="">
             <a:extLst xmlns:a="http://schemas.openxmlformats.org/drawingml/2006/main">
               <a:ext uri="{FF2B5EF4-FFF2-40B4-BE49-F238E27FC236}">
-                <a16:creationId xmlns:a16="http://schemas.microsoft.com/office/drawing/2014/main" id="{FBCCDDB5-1D69-4B1D-B8C5-3C04B6906748}"/>
+                <a16:creationId xmlns:a16="http://schemas.microsoft.com/office/drawing/2014/main" id="{840A8087-A3B3-4578-9A76-458B16816093}"/>
               </a:ext>
             </a:extLst>
           </p:cNvPr>
@@ -13249,7 +13257,7 @@
           <p:cNvPr id="5" name="">
             <a:extLst xmlns:a="http://schemas.openxmlformats.org/drawingml/2006/main">
               <a:ext uri="{FF2B5EF4-FFF2-40B4-BE49-F238E27FC236}">
-                <a16:creationId xmlns:a16="http://schemas.microsoft.com/office/drawing/2014/main" id="{9E59EDDF-7459-4B92-A371-A6AC328BEA4C}"/>
+                <a16:creationId xmlns:a16="http://schemas.microsoft.com/office/drawing/2014/main" id="{56A290E0-4B84-4101-9BFB-5B1B0AEC0AB7}"/>
               </a:ext>
             </a:extLst>
           </p:cNvPr>
@@ -13306,7 +13314,7 @@
           <p:cNvPr id="6" name="">
             <a:extLst xmlns:a="http://schemas.openxmlformats.org/drawingml/2006/main">
               <a:ext uri="{FF2B5EF4-FFF2-40B4-BE49-F238E27FC236}">
-                <a16:creationId xmlns:a16="http://schemas.microsoft.com/office/drawing/2014/main" id="{BF93201E-339F-4743-BB18-C38274EE14CA}"/>
+                <a16:creationId xmlns:a16="http://schemas.microsoft.com/office/drawing/2014/main" id="{672A64EF-2034-41B8-BA24-577B7916B1F0}"/>
               </a:ext>
             </a:extLst>
           </p:cNvPr>
@@ -13363,7 +13371,7 @@
           <p:cNvPr id="7" name="">
             <a:extLst xmlns:a="http://schemas.openxmlformats.org/drawingml/2006/main">
               <a:ext uri="{FF2B5EF4-FFF2-40B4-BE49-F238E27FC236}">
-                <a16:creationId xmlns:a16="http://schemas.microsoft.com/office/drawing/2014/main" id="{3DE3F6DA-D441-482A-A255-02C7934160B5}"/>
+                <a16:creationId xmlns:a16="http://schemas.microsoft.com/office/drawing/2014/main" id="{AFD58E98-D70D-476A-A96B-14205C5FDF4F}"/>
               </a:ext>
             </a:extLst>
           </p:cNvPr>
@@ -13395,7 +13403,7 @@
           <p:cNvPr id="8" name="">
             <a:extLst xmlns:a="http://schemas.openxmlformats.org/drawingml/2006/main">
               <a:ext uri="{FF2B5EF4-FFF2-40B4-BE49-F238E27FC236}">
-                <a16:creationId xmlns:a16="http://schemas.microsoft.com/office/drawing/2014/main" id="{48D57E0E-307B-487E-B290-DA52F160D915}"/>
+                <a16:creationId xmlns:a16="http://schemas.microsoft.com/office/drawing/2014/main" id="{F2113BE3-3B1F-4051-B548-668AFC5A710B}"/>
               </a:ext>
             </a:extLst>
           </p:cNvPr>
@@ -13452,7 +13460,7 @@
           <p:cNvPr id="9" name="">
             <a:extLst xmlns:a="http://schemas.openxmlformats.org/drawingml/2006/main">
               <a:ext uri="{FF2B5EF4-FFF2-40B4-BE49-F238E27FC236}">
-                <a16:creationId xmlns:a16="http://schemas.microsoft.com/office/drawing/2014/main" id="{B7F529D0-C432-4229-AB5C-F2524B00178D}"/>
+                <a16:creationId xmlns:a16="http://schemas.microsoft.com/office/drawing/2014/main" id="{FB8CFA9A-D5F2-47CE-A623-E0195D2420A2}"/>
               </a:ext>
             </a:extLst>
           </p:cNvPr>
@@ -13509,7 +13517,7 @@
           <p:cNvPr id="10" name="">
             <a:extLst xmlns:a="http://schemas.openxmlformats.org/drawingml/2006/main">
               <a:ext uri="{FF2B5EF4-FFF2-40B4-BE49-F238E27FC236}">
-                <a16:creationId xmlns:a16="http://schemas.microsoft.com/office/drawing/2014/main" id="{D0DB1724-FA69-4DEF-AFF5-D8619E5F0A42}"/>
+                <a16:creationId xmlns:a16="http://schemas.microsoft.com/office/drawing/2014/main" id="{65A00F2F-8362-4ECA-B276-496A2C456278}"/>
               </a:ext>
             </a:extLst>
           </p:cNvPr>
@@ -13543,7 +13551,7 @@
           <p:cNvPr id="11" name="">
             <a:extLst xmlns:a="http://schemas.openxmlformats.org/drawingml/2006/main">
               <a:ext uri="{FF2B5EF4-FFF2-40B4-BE49-F238E27FC236}">
-                <a16:creationId xmlns:a16="http://schemas.microsoft.com/office/drawing/2014/main" id="{16E2DFA1-71E0-4720-926C-E169E4BD5907}"/>
+                <a16:creationId xmlns:a16="http://schemas.microsoft.com/office/drawing/2014/main" id="{71B9EFFC-161F-4D2E-9650-43AB32C065B9}"/>
               </a:ext>
             </a:extLst>
           </p:cNvPr>
@@ -13575,7 +13583,7 @@
           <p:cNvPr id="12" name="">
             <a:extLst xmlns:a="http://schemas.openxmlformats.org/drawingml/2006/main">
               <a:ext uri="{FF2B5EF4-FFF2-40B4-BE49-F238E27FC236}">
-                <a16:creationId xmlns:a16="http://schemas.microsoft.com/office/drawing/2014/main" id="{E2E09D0B-24B5-4E24-A49F-1C8233AE337E}"/>
+                <a16:creationId xmlns:a16="http://schemas.microsoft.com/office/drawing/2014/main" id="{5D85ACA2-3D81-4DAD-BACB-F0130C33C717}"/>
               </a:ext>
             </a:extLst>
           </p:cNvPr>
@@ -13632,7 +13640,7 @@
           <p:cNvPr id="13" name="">
             <a:extLst xmlns:a="http://schemas.openxmlformats.org/drawingml/2006/main">
               <a:ext uri="{FF2B5EF4-FFF2-40B4-BE49-F238E27FC236}">
-                <a16:creationId xmlns:a16="http://schemas.microsoft.com/office/drawing/2014/main" id="{84A0D2DF-51F8-4E09-B534-FFC239C5789E}"/>
+                <a16:creationId xmlns:a16="http://schemas.microsoft.com/office/drawing/2014/main" id="{063D225E-456F-4D40-B5FB-8ADB67EB6655}"/>
               </a:ext>
             </a:extLst>
           </p:cNvPr>
@@ -13689,7 +13697,7 @@
           <p:cNvPr id="14" name="">
             <a:extLst xmlns:a="http://schemas.openxmlformats.org/drawingml/2006/main">
               <a:ext uri="{FF2B5EF4-FFF2-40B4-BE49-F238E27FC236}">
-                <a16:creationId xmlns:a16="http://schemas.microsoft.com/office/drawing/2014/main" id="{DC7CAB51-E9D0-432A-8636-14644AACCB2A}"/>
+                <a16:creationId xmlns:a16="http://schemas.microsoft.com/office/drawing/2014/main" id="{6D67896D-D37B-4AB8-9ACC-0649F465DD6D}"/>
               </a:ext>
             </a:extLst>
           </p:cNvPr>
@@ -13723,7 +13731,7 @@
           <p:cNvPr id="15" name="">
             <a:extLst xmlns:a="http://schemas.openxmlformats.org/drawingml/2006/main">
               <a:ext uri="{FF2B5EF4-FFF2-40B4-BE49-F238E27FC236}">
-                <a16:creationId xmlns:a16="http://schemas.microsoft.com/office/drawing/2014/main" id="{79047871-2718-4693-9FD2-681A4AAEB14D}"/>
+                <a16:creationId xmlns:a16="http://schemas.microsoft.com/office/drawing/2014/main" id="{D75F383F-ED76-4C5A-A126-FB5AABCAA23C}"/>
               </a:ext>
             </a:extLst>
           </p:cNvPr>
@@ -13755,7 +13763,7 @@
           <p:cNvPr id="16" name="">
             <a:extLst xmlns:a="http://schemas.openxmlformats.org/drawingml/2006/main">
               <a:ext uri="{FF2B5EF4-FFF2-40B4-BE49-F238E27FC236}">
-                <a16:creationId xmlns:a16="http://schemas.microsoft.com/office/drawing/2014/main" id="{06DA7D41-E8FA-4904-A701-9E423C57F169}"/>
+                <a16:creationId xmlns:a16="http://schemas.microsoft.com/office/drawing/2014/main" id="{05348EA7-F429-4D15-8A0D-2CC01B16B0EB}"/>
               </a:ext>
             </a:extLst>
           </p:cNvPr>
@@ -13812,7 +13820,7 @@
           <p:cNvPr id="17" name="">
             <a:extLst xmlns:a="http://schemas.openxmlformats.org/drawingml/2006/main">
               <a:ext uri="{FF2B5EF4-FFF2-40B4-BE49-F238E27FC236}">
-                <a16:creationId xmlns:a16="http://schemas.microsoft.com/office/drawing/2014/main" id="{68B99624-9397-45AE-B2F8-68739B87FBA0}"/>
+                <a16:creationId xmlns:a16="http://schemas.microsoft.com/office/drawing/2014/main" id="{2680D145-6DF3-4A36-B187-FE993A1D1301}"/>
               </a:ext>
             </a:extLst>
           </p:cNvPr>
@@ -13869,7 +13877,7 @@
           <p:cNvPr id="18" name="">
             <a:extLst xmlns:a="http://schemas.openxmlformats.org/drawingml/2006/main">
               <a:ext uri="{FF2B5EF4-FFF2-40B4-BE49-F238E27FC236}">
-                <a16:creationId xmlns:a16="http://schemas.microsoft.com/office/drawing/2014/main" id="{A92878DB-13FC-420F-99C3-D8A82FC85DC2}"/>
+                <a16:creationId xmlns:a16="http://schemas.microsoft.com/office/drawing/2014/main" id="{E626DC9D-C706-45B1-897C-FF1D81D6D461}"/>
               </a:ext>
             </a:extLst>
           </p:cNvPr>
@@ -13903,7 +13911,7 @@
           <p:cNvPr id="19" name="">
             <a:extLst xmlns:a="http://schemas.openxmlformats.org/drawingml/2006/main">
               <a:ext uri="{FF2B5EF4-FFF2-40B4-BE49-F238E27FC236}">
-                <a16:creationId xmlns:a16="http://schemas.microsoft.com/office/drawing/2014/main" id="{F3546B4A-50B2-4017-A23D-B65B2B79317D}"/>
+                <a16:creationId xmlns:a16="http://schemas.microsoft.com/office/drawing/2014/main" id="{7E3AC568-561A-4AF0-8249-1312C91D1C47}"/>
               </a:ext>
             </a:extLst>
           </p:cNvPr>
@@ -13935,7 +13943,7 @@
           <p:cNvPr id="20" name="">
             <a:extLst xmlns:a="http://schemas.openxmlformats.org/drawingml/2006/main">
               <a:ext uri="{FF2B5EF4-FFF2-40B4-BE49-F238E27FC236}">
-                <a16:creationId xmlns:a16="http://schemas.microsoft.com/office/drawing/2014/main" id="{1F6A0C73-3AA7-43AB-A2AB-38221D42D831}"/>
+                <a16:creationId xmlns:a16="http://schemas.microsoft.com/office/drawing/2014/main" id="{707063DF-3121-4874-ABA1-89825788BC85}"/>
               </a:ext>
             </a:extLst>
           </p:cNvPr>
@@ -13992,7 +14000,7 @@
           <p:cNvPr id="21" name="">
             <a:extLst xmlns:a="http://schemas.openxmlformats.org/drawingml/2006/main">
               <a:ext uri="{FF2B5EF4-FFF2-40B4-BE49-F238E27FC236}">
-                <a16:creationId xmlns:a16="http://schemas.microsoft.com/office/drawing/2014/main" id="{A548D114-5711-4588-BBD9-BDE1CA34CB7B}"/>
+                <a16:creationId xmlns:a16="http://schemas.microsoft.com/office/drawing/2014/main" id="{1472C5DA-73BC-4F71-B27C-50258534AF11}"/>
               </a:ext>
             </a:extLst>
           </p:cNvPr>
@@ -14047,7 +14055,7 @@
     </p:spTree>
     <p:extLst>
       <p:ext uri="{BB962C8B-B14F-4D97-AF65-F5344CB8AC3E}">
-        <p14:creationId xmlns:p14="http://schemas.microsoft.com/office/powerpoint/2010/main" val="1445472036"/>
+        <p14:creationId xmlns:p14="http://schemas.microsoft.com/office/powerpoint/2010/main" val="963708060"/>
       </p:ext>
     </p:extLst>
   </p:cSld>
